--- a/ppt.pptx
+++ b/ppt.pptx
@@ -11874,7 +11874,7 @@
 </file>
 
 <file path=ppt/slides/slide4.xml><?xml version="1.0" encoding="utf-8"?>
-<p:sld xmlns:a="http://schemas.openxmlformats.org/drawingml/2006/main" xmlns:p="http://schemas.openxmlformats.org/presentationml/2006/main" xmlns:r="http://schemas.openxmlformats.org/officeDocument/2006/relationships" xmlns:p14="http://schemas.microsoft.com/office/powerpoint/2010/main" xmlns:p15="http://schemas.microsoft.com/office/powerpoint/2012/main" xmlns:mc="http://schemas.openxmlformats.org/markup-compatibility/2006">
+<p:sld xmlns:p="http://schemas.openxmlformats.org/presentationml/2006/main" xmlns:a="http://schemas.openxmlformats.org/drawingml/2006/main" xmlns:r="http://schemas.openxmlformats.org/officeDocument/2006/relationships">
   <p:cSld>
     <p:spTree>
       <p:nvGrpSpPr>
@@ -11892,42 +11892,37 @@
       </p:grpSpPr>
       <p:grpSp>
         <p:nvGrpSpPr>
-          <p:cNvPr id="138" name="Group 2"/>
+          <p:cNvPr name="Group 2" id="2"/>
           <p:cNvGrpSpPr/>
           <p:nvPr/>
         </p:nvGrpSpPr>
         <p:grpSpPr>
-          <a:xfrm>
-            <a:off x="2676600" y="321840"/>
-            <a:ext cx="12902760" cy="1325160"/>
-            <a:chOff x="2676600" y="321840"/>
-            <a:chExt cx="12902760" cy="1325160"/>
+          <a:xfrm rot="0">
+            <a:off x="2676716" y="343167"/>
+            <a:ext cx="12903117" cy="1304039"/>
+            <a:chOff x="0" y="0"/>
+            <a:chExt cx="17204157" cy="1738719"/>
           </a:xfrm>
         </p:grpSpPr>
         <p:sp>
           <p:nvSpPr>
-            <p:cNvPr id="139" name="Freeform 3"/>
+            <p:cNvPr name="Freeform 3" id="3"/>
             <p:cNvSpPr/>
             <p:nvPr/>
           </p:nvSpPr>
           <p:spPr>
-            <a:xfrm>
-              <a:off x="2676600" y="343080"/>
-              <a:ext cx="12902760" cy="1303560"/>
+            <a:xfrm flipH="false" flipV="false" rot="0">
+              <a:off x="0" y="0"/>
+              <a:ext cx="17204161" cy="1738718"/>
             </a:xfrm>
             <a:custGeom>
               <a:avLst/>
-              <a:gdLst>
-                <a:gd name="textAreaLeft" fmla="*/ 0 w 12902760"/>
-                <a:gd name="textAreaRight" fmla="*/ 12903120 w 12902760"/>
-                <a:gd name="textAreaTop" fmla="*/ 0 h 1303560"/>
-                <a:gd name="textAreaBottom" fmla="*/ 1303920 h 1303560"/>
-              </a:gdLst>
+              <a:gdLst/>
               <a:ahLst/>
               <a:cxnLst/>
-              <a:rect l="textAreaLeft" t="textAreaTop" r="textAreaRight" b="textAreaBottom"/>
+              <a:rect r="r" b="b" t="t" l="l"/>
               <a:pathLst>
-                <a:path w="17204161" h="1738718">
+                <a:path h="1738718" w="17204161">
                   <a:moveTo>
                     <a:pt x="0" y="0"/>
                   </a:moveTo>
@@ -11944,137 +11939,89 @@
                 </a:path>
               </a:pathLst>
             </a:custGeom>
-            <a:blipFill rotWithShape="0">
-              <a:blip r:embed="rId1">
+            <a:blipFill>
+              <a:blip r:embed="rId2">
                 <a:alphaModFix amt="0"/>
               </a:blip>
-              <a:srcRect/>
-              <a:stretch/>
+              <a:stretch>
+                <a:fillRect l="0" t="-142799" r="0" b="-142799"/>
+              </a:stretch>
             </a:blipFill>
-            <a:ln w="0">
-              <a:noFill/>
-            </a:ln>
           </p:spPr>
-          <p:style>
-            <a:lnRef idx="0"/>
-            <a:fillRef idx="0"/>
-            <a:effectRef idx="0"/>
-            <a:fontRef idx="minor"/>
-          </p:style>
-          <p:txBody>
-            <a:bodyPr lIns="90000" tIns="45000" rIns="90000" bIns="45000" anchor="t">
-              <a:noAutofit/>
-            </a:bodyPr>
-            <a:p>
-              <a:pPr/>
-              <a:endParaRPr lang="en-IN" sz="1800" b="0" u="none" strike="noStrike">
-                <a:solidFill>
-                  <a:srgbClr val="FFFFFF"/>
-                </a:solidFill>
-                <a:effectLst/>
-                <a:uFillTx/>
-                <a:latin typeface="Arial"/>
-              </a:endParaRPr>
-            </a:p>
-          </p:txBody>
         </p:sp>
         <p:sp>
           <p:nvSpPr>
-            <p:cNvPr id="140" name="TextBox 4"/>
-            <p:cNvSpPr/>
+            <p:cNvPr name="TextBox 4" id="4"/>
+            <p:cNvSpPr txBox="true"/>
             <p:nvPr/>
           </p:nvSpPr>
           <p:spPr>
             <a:xfrm>
-              <a:off x="2676600" y="321840"/>
-              <a:ext cx="12902760" cy="1325160"/>
+              <a:off x="0" y="-28575"/>
+              <a:ext cx="17204157" cy="1767294"/>
             </a:xfrm>
             <a:prstGeom prst="rect">
               <a:avLst/>
             </a:prstGeom>
-            <a:noFill/>
-            <a:ln w="0">
-              <a:noFill/>
-            </a:ln>
           </p:spPr>
-          <p:style>
-            <a:lnRef idx="0"/>
-            <a:fillRef idx="0"/>
-            <a:effectRef idx="0"/>
-            <a:fontRef idx="minor"/>
-          </p:style>
           <p:txBody>
-            <a:bodyPr lIns="0" tIns="0" rIns="0" bIns="0" anchor="ctr">
-              <a:noAutofit/>
-            </a:bodyPr>
+            <a:bodyPr anchor="ctr" rtlCol="false" tIns="0" lIns="0" bIns="0" rIns="0"/>
+            <a:lstStyle/>
             <a:p>
-              <a:pPr algn="ctr" defTabSz="914400">
+              <a:pPr algn="ctr">
                 <a:lnSpc>
-                  <a:spcPts val="5403"/>
+                  <a:spcPts val="5404"/>
                 </a:lnSpc>
               </a:pPr>
               <a:r>
-                <a:rPr lang="en-US" sz="4500" b="0" u="none" strike="noStrike">
+                <a:rPr lang="en-US" sz="4503">
                   <a:solidFill>
                     <a:srgbClr val="000000"/>
                   </a:solidFill>
-                  <a:effectLst/>
-                  <a:uFillTx/>
                   <a:latin typeface="Arial"/>
                   <a:ea typeface="Arial"/>
+                  <a:cs typeface="Arial"/>
+                  <a:sym typeface="Arial"/>
                 </a:rPr>
                 <a:t>DATASET &amp; INSIGHTS</a:t>
               </a:r>
-              <a:endParaRPr lang="en-IN" sz="4500" b="0" u="none" strike="noStrike">
-                <a:solidFill>
-                  <a:srgbClr val="000000"/>
-                </a:solidFill>
-                <a:effectLst/>
-                <a:uFillTx/>
-                <a:latin typeface="Arial"/>
-              </a:endParaRPr>
             </a:p>
           </p:txBody>
         </p:sp>
       </p:grpSp>
       <p:grpSp>
         <p:nvGrpSpPr>
-          <p:cNvPr id="141" name="Group 5"/>
+          <p:cNvPr name="Group 5" id="5"/>
           <p:cNvGrpSpPr/>
           <p:nvPr/>
         </p:nvGrpSpPr>
         <p:grpSpPr>
-          <a:xfrm>
-            <a:off x="617760" y="205920"/>
-            <a:ext cx="1717920" cy="1372320"/>
-            <a:chOff x="617760" y="205920"/>
-            <a:chExt cx="1717920" cy="1372320"/>
+          <a:xfrm rot="0">
+            <a:off x="617706" y="205902"/>
+            <a:ext cx="1718386" cy="1372676"/>
+            <a:chOff x="0" y="0"/>
+            <a:chExt cx="2291182" cy="1830235"/>
           </a:xfrm>
         </p:grpSpPr>
         <p:sp>
           <p:nvSpPr>
-            <p:cNvPr id="142" name="Freeform 6" descr="logo-dsc-light.png"/>
+            <p:cNvPr name="Freeform 6" id="6" descr="logo-dsc-light.png"/>
             <p:cNvSpPr/>
             <p:nvPr/>
           </p:nvSpPr>
           <p:spPr>
-            <a:xfrm>
-              <a:off x="617760" y="205920"/>
-              <a:ext cx="1717920" cy="1372320"/>
+            <a:xfrm flipH="false" flipV="false" rot="0">
+              <a:off x="0" y="0"/>
+              <a:ext cx="2291207" cy="1830197"/>
             </a:xfrm>
             <a:custGeom>
               <a:avLst/>
-              <a:gdLst>
-                <a:gd name="textAreaLeft" fmla="*/ 0 w 1717920"/>
-                <a:gd name="textAreaRight" fmla="*/ 1718280 w 1717920"/>
-                <a:gd name="textAreaTop" fmla="*/ 0 h 1372320"/>
-                <a:gd name="textAreaBottom" fmla="*/ 1372680 h 1372320"/>
-              </a:gdLst>
+              <a:gdLst/>
               <a:ahLst/>
               <a:cxnLst/>
-              <a:rect l="textAreaLeft" t="textAreaTop" r="textAreaRight" b="textAreaBottom"/>
+              <a:rect r="r" b="b" t="t" l="l"/>
               <a:pathLst>
-                <a:path w="2291207" h="1830197">
+                <a:path h="1830197" w="2291207">
                   <a:moveTo>
                     <a:pt x="0" y="0"/>
                   </a:moveTo>
@@ -12094,77 +12041,48 @@
                 </a:path>
               </a:pathLst>
             </a:custGeom>
-            <a:blipFill rotWithShape="0">
-              <a:blip r:embed="rId2"/>
-              <a:srcRect/>
-              <a:stretch/>
+            <a:blipFill>
+              <a:blip r:embed="rId3"/>
+              <a:stretch>
+                <a:fillRect l="0" t="0" r="1" b="-2"/>
+              </a:stretch>
             </a:blipFill>
-            <a:ln w="0">
-              <a:noFill/>
-            </a:ln>
           </p:spPr>
-          <p:style>
-            <a:lnRef idx="0"/>
-            <a:fillRef idx="0"/>
-            <a:effectRef idx="0"/>
-            <a:fontRef idx="minor"/>
-          </p:style>
-          <p:txBody>
-            <a:bodyPr lIns="90000" tIns="45000" rIns="90000" bIns="45000" anchor="t">
-              <a:noAutofit/>
-            </a:bodyPr>
-            <a:p>
-              <a:pPr/>
-              <a:endParaRPr lang="en-IN" sz="1800" b="0" u="none" strike="noStrike">
-                <a:solidFill>
-                  <a:srgbClr val="FFFFFF"/>
-                </a:solidFill>
-                <a:effectLst/>
-                <a:uFillTx/>
-                <a:latin typeface="Arial"/>
-              </a:endParaRPr>
-            </a:p>
-          </p:txBody>
         </p:sp>
       </p:grpSp>
       <p:grpSp>
         <p:nvGrpSpPr>
-          <p:cNvPr id="143" name="Group 7"/>
+          <p:cNvPr name="Group 7" id="7"/>
           <p:cNvGrpSpPr/>
           <p:nvPr/>
         </p:nvGrpSpPr>
         <p:grpSpPr>
-          <a:xfrm>
-            <a:off x="15373800" y="480600"/>
-            <a:ext cx="2248200" cy="850680"/>
-            <a:chOff x="15373800" y="480600"/>
-            <a:chExt cx="2248200" cy="850680"/>
+          <a:xfrm rot="0">
+            <a:off x="15373931" y="480431"/>
+            <a:ext cx="2248529" cy="851059"/>
+            <a:chOff x="0" y="0"/>
+            <a:chExt cx="2998038" cy="1134745"/>
           </a:xfrm>
         </p:grpSpPr>
         <p:sp>
           <p:nvSpPr>
-            <p:cNvPr id="144" name="Freeform 8" descr="logo-iiec-light.png"/>
+            <p:cNvPr name="Freeform 8" id="8" descr="logo-iiec-light.png"/>
             <p:cNvSpPr/>
             <p:nvPr/>
           </p:nvSpPr>
           <p:spPr>
-            <a:xfrm>
-              <a:off x="15373800" y="480600"/>
-              <a:ext cx="2248200" cy="850680"/>
+            <a:xfrm flipH="false" flipV="false" rot="0">
+              <a:off x="0" y="0"/>
+              <a:ext cx="2998089" cy="1134745"/>
             </a:xfrm>
             <a:custGeom>
               <a:avLst/>
-              <a:gdLst>
-                <a:gd name="textAreaLeft" fmla="*/ 0 w 2248200"/>
-                <a:gd name="textAreaRight" fmla="*/ 2248560 w 2248200"/>
-                <a:gd name="textAreaTop" fmla="*/ 0 h 850680"/>
-                <a:gd name="textAreaBottom" fmla="*/ 851040 h 850680"/>
-              </a:gdLst>
+              <a:gdLst/>
               <a:ahLst/>
               <a:cxnLst/>
-              <a:rect l="textAreaLeft" t="textAreaTop" r="textAreaRight" b="textAreaBottom"/>
+              <a:rect r="r" b="b" t="t" l="l"/>
               <a:pathLst>
-                <a:path w="2998089" h="1134745">
+                <a:path h="1134745" w="2998089">
                   <a:moveTo>
                     <a:pt x="0" y="0"/>
                   </a:moveTo>
@@ -12184,77 +12102,48 @@
                 </a:path>
               </a:pathLst>
             </a:custGeom>
-            <a:blipFill rotWithShape="0">
-              <a:blip r:embed="rId3"/>
-              <a:srcRect/>
-              <a:stretch/>
+            <a:blipFill>
+              <a:blip r:embed="rId4"/>
+              <a:stretch>
+                <a:fillRect l="0" t="0" r="1" b="0"/>
+              </a:stretch>
             </a:blipFill>
-            <a:ln w="0">
-              <a:noFill/>
-            </a:ln>
           </p:spPr>
-          <p:style>
-            <a:lnRef idx="0"/>
-            <a:fillRef idx="0"/>
-            <a:effectRef idx="0"/>
-            <a:fontRef idx="minor"/>
-          </p:style>
-          <p:txBody>
-            <a:bodyPr lIns="90000" tIns="45000" rIns="90000" bIns="45000" anchor="t">
-              <a:noAutofit/>
-            </a:bodyPr>
-            <a:p>
-              <a:pPr/>
-              <a:endParaRPr lang="en-IN" sz="1800" b="0" u="none" strike="noStrike">
-                <a:solidFill>
-                  <a:srgbClr val="FFFFFF"/>
-                </a:solidFill>
-                <a:effectLst/>
-                <a:uFillTx/>
-                <a:latin typeface="Arial"/>
-              </a:endParaRPr>
-            </a:p>
-          </p:txBody>
         </p:sp>
       </p:grpSp>
       <p:grpSp>
         <p:nvGrpSpPr>
-          <p:cNvPr id="145" name="Group 9"/>
+          <p:cNvPr name="Group 9" id="9"/>
           <p:cNvGrpSpPr/>
           <p:nvPr/>
         </p:nvGrpSpPr>
         <p:grpSpPr>
-          <a:xfrm>
-            <a:off x="0" y="9540000"/>
-            <a:ext cx="18301320" cy="754560"/>
-            <a:chOff x="0" y="9540000"/>
-            <a:chExt cx="18301320" cy="754560"/>
+          <a:xfrm rot="0">
+            <a:off x="0" y="9540069"/>
+            <a:ext cx="18301840" cy="754971"/>
+            <a:chOff x="0" y="0"/>
+            <a:chExt cx="24402453" cy="1006627"/>
           </a:xfrm>
         </p:grpSpPr>
         <p:sp>
           <p:nvSpPr>
-            <p:cNvPr id="146" name="Freeform 10"/>
+            <p:cNvPr name="Freeform 10" id="10"/>
             <p:cNvSpPr/>
             <p:nvPr/>
           </p:nvSpPr>
           <p:spPr>
-            <a:xfrm>
-              <a:off x="0" y="9540000"/>
-              <a:ext cx="18301320" cy="754560"/>
+            <a:xfrm flipH="false" flipV="false" rot="0">
+              <a:off x="0" y="0"/>
+              <a:ext cx="24402414" cy="1006602"/>
             </a:xfrm>
             <a:custGeom>
               <a:avLst/>
-              <a:gdLst>
-                <a:gd name="textAreaLeft" fmla="*/ 0 w 18301320"/>
-                <a:gd name="textAreaRight" fmla="*/ 18301680 w 18301320"/>
-                <a:gd name="textAreaTop" fmla="*/ 0 h 754560"/>
-                <a:gd name="textAreaBottom" fmla="*/ 754920 h 754560"/>
-              </a:gdLst>
+              <a:gdLst/>
               <a:ahLst/>
               <a:cxnLst/>
-              <a:rect l="textAreaLeft" t="textAreaTop" r="textAreaRight" b="textAreaBottom"/>
+              <a:rect r="r" b="b" t="t" l="l"/>
               <a:pathLst>
-                <a:path w="24402414" h="1006602">
+                <a:path h="1006602" w="24402414">
                   <a:moveTo>
                     <a:pt x="0" y="0"/>
                   </a:moveTo>
@@ -12274,72 +12163,42 @@
             <a:solidFill>
               <a:srgbClr val="19E3F5"/>
             </a:solidFill>
-            <a:ln w="0">
-              <a:noFill/>
-            </a:ln>
           </p:spPr>
-          <p:style>
-            <a:lnRef idx="0"/>
-            <a:fillRef idx="0"/>
-            <a:effectRef idx="0"/>
-            <a:fontRef idx="minor"/>
-          </p:style>
-          <p:txBody>
-            <a:bodyPr lIns="90000" tIns="45000" rIns="90000" bIns="45000" anchor="t">
-              <a:noAutofit/>
-            </a:bodyPr>
-            <a:p>
-              <a:pPr/>
-              <a:endParaRPr lang="en-IN" sz="1800" b="0" u="none" strike="noStrike">
-                <a:solidFill>
-                  <a:srgbClr val="000000"/>
-                </a:solidFill>
-                <a:effectLst/>
-                <a:uFillTx/>
-                <a:latin typeface="Arial"/>
-              </a:endParaRPr>
-            </a:p>
-          </p:txBody>
         </p:sp>
       </p:grpSp>
       <p:grpSp>
         <p:nvGrpSpPr>
-          <p:cNvPr id="147" name="Group 11"/>
+          <p:cNvPr name="Group 11" id="11"/>
           <p:cNvGrpSpPr/>
           <p:nvPr/>
         </p:nvGrpSpPr>
         <p:grpSpPr>
-          <a:xfrm>
-            <a:off x="0" y="9525960"/>
-            <a:ext cx="18301320" cy="768960"/>
-            <a:chOff x="0" y="9525960"/>
-            <a:chExt cx="18301320" cy="768960"/>
+          <a:xfrm rot="0">
+            <a:off x="0" y="9540069"/>
+            <a:ext cx="18301840" cy="754971"/>
+            <a:chOff x="0" y="0"/>
+            <a:chExt cx="24402453" cy="1006627"/>
           </a:xfrm>
         </p:grpSpPr>
         <p:sp>
           <p:nvSpPr>
-            <p:cNvPr id="148" name="Freeform 12"/>
+            <p:cNvPr name="Freeform 12" id="12"/>
             <p:cNvSpPr/>
             <p:nvPr/>
           </p:nvSpPr>
           <p:spPr>
-            <a:xfrm>
-              <a:off x="0" y="9540000"/>
-              <a:ext cx="18301320" cy="754560"/>
+            <a:xfrm flipH="false" flipV="false" rot="0">
+              <a:off x="0" y="0"/>
+              <a:ext cx="24402455" cy="1006626"/>
             </a:xfrm>
             <a:custGeom>
               <a:avLst/>
-              <a:gdLst>
-                <a:gd name="textAreaLeft" fmla="*/ 0 w 18301320"/>
-                <a:gd name="textAreaRight" fmla="*/ 18301680 w 18301320"/>
-                <a:gd name="textAreaTop" fmla="*/ 0 h 754560"/>
-                <a:gd name="textAreaBottom" fmla="*/ 754920 h 754560"/>
-              </a:gdLst>
+              <a:gdLst/>
               <a:ahLst/>
               <a:cxnLst/>
-              <a:rect l="textAreaLeft" t="textAreaTop" r="textAreaRight" b="textAreaBottom"/>
+              <a:rect r="r" b="b" t="t" l="l"/>
               <a:pathLst>
-                <a:path w="24402455" h="1006626">
+                <a:path h="1006626" w="24402455">
                   <a:moveTo>
                     <a:pt x="0" y="0"/>
                   </a:moveTo>
@@ -12356,137 +12215,89 @@
                 </a:path>
               </a:pathLst>
             </a:custGeom>
-            <a:blipFill rotWithShape="0">
-              <a:blip r:embed="rId4">
+            <a:blipFill>
+              <a:blip r:embed="rId2">
                 <a:alphaModFix amt="0"/>
               </a:blip>
-              <a:srcRect/>
-              <a:stretch/>
+              <a:stretch>
+                <a:fillRect l="0" t="-422352" r="0" b="-422352"/>
+              </a:stretch>
             </a:blipFill>
-            <a:ln w="0">
-              <a:noFill/>
-            </a:ln>
           </p:spPr>
-          <p:style>
-            <a:lnRef idx="0"/>
-            <a:fillRef idx="0"/>
-            <a:effectRef idx="0"/>
-            <a:fontRef idx="minor"/>
-          </p:style>
-          <p:txBody>
-            <a:bodyPr lIns="90000" tIns="45000" rIns="90000" bIns="45000" anchor="t">
-              <a:noAutofit/>
-            </a:bodyPr>
-            <a:p>
-              <a:pPr/>
-              <a:endParaRPr lang="en-IN" sz="1800" b="0" u="none" strike="noStrike">
-                <a:solidFill>
-                  <a:srgbClr val="FFFFFF"/>
-                </a:solidFill>
-                <a:effectLst/>
-                <a:uFillTx/>
-                <a:latin typeface="Arial"/>
-              </a:endParaRPr>
-            </a:p>
-          </p:txBody>
         </p:sp>
         <p:sp>
           <p:nvSpPr>
-            <p:cNvPr id="149" name="TextBox 13"/>
-            <p:cNvSpPr/>
+            <p:cNvPr name="TextBox 13" id="13"/>
+            <p:cNvSpPr txBox="true"/>
             <p:nvPr/>
           </p:nvSpPr>
           <p:spPr>
             <a:xfrm>
-              <a:off x="0" y="9525960"/>
-              <a:ext cx="18301320" cy="768960"/>
+              <a:off x="0" y="-19050"/>
+              <a:ext cx="24402453" cy="1025677"/>
             </a:xfrm>
             <a:prstGeom prst="rect">
               <a:avLst/>
             </a:prstGeom>
-            <a:noFill/>
-            <a:ln w="0">
-              <a:noFill/>
-            </a:ln>
           </p:spPr>
-          <p:style>
-            <a:lnRef idx="0"/>
-            <a:fillRef idx="0"/>
-            <a:effectRef idx="0"/>
-            <a:fontRef idx="minor"/>
-          </p:style>
           <p:txBody>
-            <a:bodyPr lIns="0" tIns="0" rIns="0" bIns="0" anchor="ctr">
-              <a:noAutofit/>
-            </a:bodyPr>
+            <a:bodyPr anchor="ctr" rtlCol="false" tIns="0" lIns="0" bIns="0" rIns="0"/>
+            <a:lstStyle/>
             <a:p>
-              <a:pPr algn="ctr" defTabSz="914400">
+              <a:pPr algn="ctr">
                 <a:lnSpc>
-                  <a:spcPts val="2160"/>
+                  <a:spcPts val="2161"/>
                 </a:lnSpc>
               </a:pPr>
               <a:r>
-                <a:rPr lang="en-US" sz="1800" b="1" u="none" strike="noStrike">
+                <a:rPr lang="en-US" sz="1801" b="true">
                   <a:solidFill>
                     <a:srgbClr val="000000"/>
                   </a:solidFill>
-                  <a:effectLst/>
-                  <a:uFillTx/>
                   <a:latin typeface="Arial Bold"/>
                   <a:ea typeface="Arial Bold"/>
+                  <a:cs typeface="Arial Bold"/>
+                  <a:sym typeface="Arial Bold"/>
                 </a:rPr>
                 <a:t>DATATHON 2026  ·  Round 1 Idea Submission – Template</a:t>
               </a:r>
-              <a:endParaRPr lang="en-IN" sz="1800" b="0" u="none" strike="noStrike">
-                <a:solidFill>
-                  <a:srgbClr val="000000"/>
-                </a:solidFill>
-                <a:effectLst/>
-                <a:uFillTx/>
-                <a:latin typeface="Arial"/>
-              </a:endParaRPr>
             </a:p>
           </p:txBody>
         </p:sp>
       </p:grpSp>
       <p:grpSp>
         <p:nvGrpSpPr>
-          <p:cNvPr id="150" name="Group 14"/>
+          <p:cNvPr name="Group 14" id="14"/>
           <p:cNvGrpSpPr/>
           <p:nvPr/>
         </p:nvGrpSpPr>
         <p:grpSpPr>
-          <a:xfrm>
-            <a:off x="16334640" y="9525960"/>
-            <a:ext cx="1509480" cy="768960"/>
-            <a:chOff x="16334640" y="9525960"/>
-            <a:chExt cx="1509480" cy="768960"/>
+          <a:xfrm rot="0">
+            <a:off x="16334804" y="9540069"/>
+            <a:ext cx="1509941" cy="754971"/>
+            <a:chOff x="0" y="0"/>
+            <a:chExt cx="2013255" cy="1006627"/>
           </a:xfrm>
         </p:grpSpPr>
         <p:sp>
           <p:nvSpPr>
-            <p:cNvPr id="151" name="Freeform 15"/>
+            <p:cNvPr name="Freeform 15" id="15"/>
             <p:cNvSpPr/>
             <p:nvPr/>
           </p:nvSpPr>
           <p:spPr>
-            <a:xfrm>
-              <a:off x="16334640" y="9540000"/>
-              <a:ext cx="1509480" cy="754560"/>
+            <a:xfrm flipH="false" flipV="false" rot="0">
+              <a:off x="0" y="0"/>
+              <a:ext cx="2013253" cy="1006626"/>
             </a:xfrm>
             <a:custGeom>
               <a:avLst/>
-              <a:gdLst>
-                <a:gd name="textAreaLeft" fmla="*/ 0 w 1509480"/>
-                <a:gd name="textAreaRight" fmla="*/ 1509840 w 1509480"/>
-                <a:gd name="textAreaTop" fmla="*/ 0 h 754560"/>
-                <a:gd name="textAreaBottom" fmla="*/ 754920 h 754560"/>
-              </a:gdLst>
+              <a:gdLst/>
               <a:ahLst/>
               <a:cxnLst/>
-              <a:rect l="textAreaLeft" t="textAreaTop" r="textAreaRight" b="textAreaBottom"/>
+              <a:rect r="r" b="b" t="t" l="l"/>
               <a:pathLst>
-                <a:path w="2013253" h="1006626">
+                <a:path h="1006626" w="2013253">
                   <a:moveTo>
                     <a:pt x="0" y="0"/>
                   </a:moveTo>
@@ -12503,306 +12314,1432 @@
                 </a:path>
               </a:pathLst>
             </a:custGeom>
-            <a:blipFill rotWithShape="0">
-              <a:blip r:embed="rId5">
+            <a:blipFill>
+              <a:blip r:embed="rId2">
                 <a:alphaModFix amt="0"/>
               </a:blip>
-              <a:srcRect/>
-              <a:stretch/>
+              <a:stretch>
+                <a:fillRect l="-14151" t="0" r="-14151" b="0"/>
+              </a:stretch>
             </a:blipFill>
-            <a:ln w="0">
-              <a:noFill/>
-            </a:ln>
           </p:spPr>
-          <p:style>
-            <a:lnRef idx="0"/>
-            <a:fillRef idx="0"/>
-            <a:effectRef idx="0"/>
-            <a:fontRef idx="minor"/>
-          </p:style>
-          <p:txBody>
-            <a:bodyPr lIns="90000" tIns="45000" rIns="90000" bIns="45000" anchor="t">
-              <a:noAutofit/>
-            </a:bodyPr>
-            <a:p>
-              <a:pPr/>
-              <a:endParaRPr lang="en-IN" sz="1800" b="0" u="none" strike="noStrike">
-                <a:solidFill>
-                  <a:srgbClr val="FFFFFF"/>
-                </a:solidFill>
-                <a:effectLst/>
-                <a:uFillTx/>
-                <a:latin typeface="Arial"/>
-              </a:endParaRPr>
-            </a:p>
-          </p:txBody>
         </p:sp>
         <p:sp>
           <p:nvSpPr>
-            <p:cNvPr id="152" name="TextBox 16"/>
-            <p:cNvSpPr/>
+            <p:cNvPr name="TextBox 16" id="16"/>
+            <p:cNvSpPr txBox="true"/>
             <p:nvPr/>
           </p:nvSpPr>
           <p:spPr>
             <a:xfrm>
-              <a:off x="16334640" y="9525960"/>
-              <a:ext cx="1509480" cy="768960"/>
+              <a:off x="0" y="-19050"/>
+              <a:ext cx="2013255" cy="1025677"/>
             </a:xfrm>
             <a:prstGeom prst="rect">
               <a:avLst/>
             </a:prstGeom>
-            <a:noFill/>
-            <a:ln w="0">
-              <a:noFill/>
-            </a:ln>
           </p:spPr>
-          <p:style>
-            <a:lnRef idx="0"/>
-            <a:fillRef idx="0"/>
-            <a:effectRef idx="0"/>
-            <a:fontRef idx="minor"/>
-          </p:style>
           <p:txBody>
-            <a:bodyPr lIns="0" tIns="0" rIns="0" bIns="0" anchor="ctr">
-              <a:noAutofit/>
-            </a:bodyPr>
+            <a:bodyPr anchor="ctr" rtlCol="false" tIns="0" lIns="0" bIns="0" rIns="0"/>
+            <a:lstStyle/>
             <a:p>
-              <a:pPr algn="r" defTabSz="914400">
+              <a:pPr algn="r">
                 <a:lnSpc>
                   <a:spcPts val="2341"/>
                 </a:lnSpc>
               </a:pPr>
               <a:r>
-                <a:rPr lang="en-US" sz="1950" b="1" u="none" strike="noStrike">
+                <a:rPr lang="en-US" sz="1951" b="true">
                   <a:solidFill>
                     <a:srgbClr val="000000"/>
                   </a:solidFill>
-                  <a:effectLst/>
-                  <a:uFillTx/>
                   <a:latin typeface="Arial Bold"/>
                   <a:ea typeface="Arial Bold"/>
+                  <a:cs typeface="Arial Bold"/>
+                  <a:sym typeface="Arial Bold"/>
                 </a:rPr>
                 <a:t>4</a:t>
               </a:r>
-              <a:endParaRPr lang="en-IN" sz="1950" b="0" u="none" strike="noStrike">
-                <a:solidFill>
-                  <a:srgbClr val="000000"/>
-                </a:solidFill>
-                <a:effectLst/>
-                <a:uFillTx/>
-                <a:latin typeface="Arial"/>
-              </a:endParaRPr>
             </a:p>
           </p:txBody>
         </p:sp>
       </p:grpSp>
       <p:sp>
         <p:nvSpPr>
-          <p:cNvPr id="153" name="TextBox 17"/>
+          <p:cNvPr name="TextBox 17" id="17"/>
+          <p:cNvSpPr txBox="true"/>
+          <p:nvPr/>
+        </p:nvSpPr>
+        <p:spPr>
+          <a:xfrm rot="0">
+            <a:off x="915048" y="2291582"/>
+            <a:ext cx="16426453" cy="751218"/>
+          </a:xfrm>
+          <a:prstGeom prst="rect">
+            <a:avLst/>
+          </a:prstGeom>
+        </p:spPr>
+        <p:txBody>
+          <a:bodyPr anchor="t" rtlCol="false" tIns="0" lIns="0" bIns="0" rIns="0">
+            <a:spAutoFit/>
+          </a:bodyPr>
+          <a:lstStyle/>
+          <a:p>
+            <a:pPr algn="l">
+              <a:lnSpc>
+                <a:spcPts val="5043"/>
+              </a:lnSpc>
+            </a:pPr>
+            <a:r>
+              <a:rPr lang="en-US" sz="4203" b="true">
+                <a:solidFill>
+                  <a:srgbClr val="000000"/>
+                </a:solidFill>
+                <a:latin typeface="Arial Bold"/>
+                <a:ea typeface="Arial Bold"/>
+                <a:cs typeface="Arial Bold"/>
+                <a:sym typeface="Arial Bold"/>
+              </a:rPr>
+              <a:t>❖ </a:t>
+            </a:r>
+            <a:r>
+              <a:rPr lang="en-US" b="true" sz="4203" u="sng">
+                <a:solidFill>
+                  <a:srgbClr val="000000"/>
+                </a:solidFill>
+                <a:latin typeface="Arial Bold"/>
+                <a:ea typeface="Arial Bold"/>
+                <a:cs typeface="Arial Bold"/>
+                <a:sym typeface="Arial Bold"/>
+              </a:rPr>
+              <a:t>Dataset &amp; Insights</a:t>
+            </a:r>
+          </a:p>
+        </p:txBody>
+      </p:sp>
+      <p:sp>
+        <p:nvSpPr>
+          <p:cNvPr name="Src0" id="100"/>
           <p:cNvSpPr/>
           <p:nvPr/>
         </p:nvSpPr>
         <p:spPr>
           <a:xfrm>
-            <a:off x="915120" y="2291760"/>
-            <a:ext cx="16426080" cy="750960"/>
-          </a:xfrm>
-          <a:prstGeom prst="rect">
-            <a:avLst/>
-          </a:prstGeom>
-          <a:noFill/>
-          <a:ln w="0">
+            <a:off x="617706" y="3140000"/>
+            <a:ext cx="5497529" cy="1500000"/>
+          </a:xfrm>
+          <a:prstGeom prst="rect">
+            <a:avLst/>
+          </a:prstGeom>
+          <a:solidFill>
+            <a:srgbClr val="FFFFFF"/>
+          </a:solidFill>
+          <a:ln w="12700">
+            <a:solidFill>
+              <a:srgbClr val="D9D9D9"/>
+            </a:solidFill>
+          </a:ln>
+        </p:spPr>
+        <p:txBody>
+          <a:bodyPr/>
+          <a:lstStyle/>
+          <a:p>
+            <a:endParaRPr lang="en-US"/>
+          </a:p>
+        </p:txBody>
+      </p:sp>
+      <p:sp>
+        <p:nvSpPr>
+          <p:cNvPr name="SrcAcc0" id="103"/>
+          <p:cNvSpPr/>
+          <p:nvPr/>
+        </p:nvSpPr>
+        <p:spPr>
+          <a:xfrm>
+            <a:off x="617706" y="3140000"/>
+            <a:ext cx="90000" cy="1500000"/>
+          </a:xfrm>
+          <a:prstGeom prst="rect">
+            <a:avLst/>
+          </a:prstGeom>
+          <a:solidFill>
+            <a:srgbClr val="19E3F5"/>
+          </a:solidFill>
+          <a:ln>
             <a:noFill/>
           </a:ln>
         </p:spPr>
-        <p:style>
-          <a:lnRef idx="0"/>
-          <a:fillRef idx="0"/>
-          <a:effectRef idx="0"/>
-          <a:fontRef idx="minor"/>
-        </p:style>
-        <p:txBody>
-          <a:bodyPr lIns="0" tIns="0" rIns="0" bIns="0" anchor="t">
-            <a:spAutoFit/>
-          </a:bodyPr>
-          <a:p>
-            <a:pPr defTabSz="914400">
-              <a:lnSpc>
-                <a:spcPts val="5043"/>
-              </a:lnSpc>
+        <p:txBody>
+          <a:bodyPr/>
+          <a:lstStyle/>
+          <a:p>
+            <a:endParaRPr lang="en-US"/>
+          </a:p>
+        </p:txBody>
+      </p:sp>
+      <p:sp>
+        <p:nvSpPr>
+          <p:cNvPr name="SrcTxt0" id="106"/>
+          <p:cNvSpPr txBox="true"/>
+          <p:nvPr/>
+        </p:nvSpPr>
+        <p:spPr>
+          <a:xfrm>
+            <a:off x="617706" y="3140000"/>
+            <a:ext cx="5497529" cy="1500000"/>
+          </a:xfrm>
+          <a:prstGeom prst="rect">
+            <a:avLst/>
+          </a:prstGeom>
+        </p:spPr>
+        <p:txBody>
+          <a:bodyPr anchor="ctr" lIns="300000" rIns="240000" tIns="80000" bIns="80000"/>
+          <a:lstStyle/>
+          <a:p>
+            <a:pPr algn="l"/>
+            <a:r>
+              <a:rPr lang="en-US" sz="2600" b="true">
+                <a:solidFill>
+                  <a:srgbClr val="0B9FB0"/>
+                </a:solidFill>
+                <a:latin typeface="Arial"/>
+                <a:cs typeface="Arial"/>
+              </a:rPr>
+              <a:t>1,000  </a:t>
+            </a:r>
+            <a:r>
+              <a:rPr lang="en-US" sz="1700" b="true">
+                <a:solidFill>
+                  <a:srgbClr val="000000"/>
+                </a:solidFill>
+                <a:latin typeface="Arial"/>
+                <a:cs typeface="Arial"/>
+              </a:rPr>
+              <a:t>Locations</a:t>
+            </a:r>
+          </a:p>
+          <a:p>
+            <a:pPr algn="l">
+              <a:lnSpc>
+                <a:spcPct val="106000"/>
+              </a:lnSpc>
+              <a:spcBef>
+                <a:spcPts val="400"/>
+              </a:spcBef>
             </a:pPr>
             <a:r>
-              <a:rPr lang="en-US" sz="4200" b="1" u="none" strike="noStrike">
-                <a:solidFill>
-                  <a:srgbClr val="000000"/>
-                </a:solidFill>
-                <a:effectLst/>
-                <a:uFillTx/>
-                <a:latin typeface="Arial Bold"/>
-                <a:ea typeface="Arial Bold"/>
-              </a:rPr>
-              <a:t>❖ </a:t>
-            </a:r>
-            <a:r>
-              <a:rPr lang="en-US" sz="4200" b="1" u="sng" strike="noStrike">
-                <a:solidFill>
-                  <a:srgbClr val="000000"/>
-                </a:solidFill>
-                <a:effectLst/>
-                <a:uFillTx/>
-                <a:latin typeface="Arial Bold"/>
-                <a:ea typeface="Arial Bold"/>
-              </a:rPr>
-              <a:t>Dataset Usage</a:t>
-            </a:r>
-            <a:endParaRPr lang="en-IN" sz="4200" b="0" u="none" strike="noStrike">
-              <a:solidFill>
-                <a:srgbClr val="000000"/>
-              </a:solidFill>
-              <a:effectLst/>
-              <a:uFillTx/>
-              <a:latin typeface="Arial"/>
-            </a:endParaRPr>
-          </a:p>
-        </p:txBody>
-      </p:sp>
-      <p:sp>
-        <p:nvSpPr>
-          <p:cNvPr id="154" name="TextBox 18"/>
+              <a:rPr lang="en-US" sz="1250">
+                <a:solidFill>
+                  <a:srgbClr val="333333"/>
+                </a:solidFill>
+                <a:latin typeface="Arial"/>
+                <a:cs typeface="Arial"/>
+              </a:rPr>
+              <a:t>road type and condition, pedestrian activity, near school/hospital, lat and long</a:t>
+            </a:r>
+          </a:p>
+        </p:txBody>
+      </p:sp>
+      <p:sp>
+        <p:nvSpPr>
+          <p:cNvPr name="Src1" id="101"/>
           <p:cNvSpPr/>
           <p:nvPr/>
         </p:nvSpPr>
         <p:spPr>
           <a:xfrm>
-            <a:off x="915120" y="3311640"/>
-            <a:ext cx="16426080" cy="2682000"/>
-          </a:xfrm>
-          <a:prstGeom prst="rect">
-            <a:avLst/>
-          </a:prstGeom>
-          <a:noFill/>
-          <a:ln w="0">
+            <a:off x="6395235" y="3140000"/>
+            <a:ext cx="5497529" cy="1500000"/>
+          </a:xfrm>
+          <a:prstGeom prst="rect">
+            <a:avLst/>
+          </a:prstGeom>
+          <a:solidFill>
+            <a:srgbClr val="FFFFFF"/>
+          </a:solidFill>
+          <a:ln w="12700">
+            <a:solidFill>
+              <a:srgbClr val="D9D9D9"/>
+            </a:solidFill>
+          </a:ln>
+        </p:spPr>
+        <p:txBody>
+          <a:bodyPr/>
+          <a:lstStyle/>
+          <a:p>
+            <a:endParaRPr lang="en-US"/>
+          </a:p>
+        </p:txBody>
+      </p:sp>
+      <p:sp>
+        <p:nvSpPr>
+          <p:cNvPr name="SrcAcc1" id="104"/>
+          <p:cNvSpPr/>
+          <p:nvPr/>
+        </p:nvSpPr>
+        <p:spPr>
+          <a:xfrm>
+            <a:off x="6395235" y="3140000"/>
+            <a:ext cx="90000" cy="1500000"/>
+          </a:xfrm>
+          <a:prstGeom prst="rect">
+            <a:avLst/>
+          </a:prstGeom>
+          <a:solidFill>
+            <a:srgbClr val="19E3F5"/>
+          </a:solidFill>
+          <a:ln>
             <a:noFill/>
           </a:ln>
         </p:spPr>
-        <p:style>
-          <a:lnRef idx="0"/>
-          <a:fillRef idx="0"/>
-          <a:effectRef idx="0"/>
-          <a:fontRef idx="minor"/>
-        </p:style>
-        <p:txBody>
-          <a:bodyPr lIns="0" tIns="0" rIns="0" bIns="0" anchor="t">
-            <a:spAutoFit/>
-          </a:bodyPr>
-          <a:p>
-            <a:pPr marL="652680" lvl="1" indent="-326160" defTabSz="914400">
-              <a:lnSpc>
-                <a:spcPts val="4323"/>
-              </a:lnSpc>
-              <a:buClr>
-                <a:srgbClr val="000000"/>
-              </a:buClr>
-              <a:buFont typeface="Arial"/>
-              <a:buChar char="•"/>
+        <p:txBody>
+          <a:bodyPr/>
+          <a:lstStyle/>
+          <a:p>
+            <a:endParaRPr lang="en-US"/>
+          </a:p>
+        </p:txBody>
+      </p:sp>
+      <p:sp>
+        <p:nvSpPr>
+          <p:cNvPr name="SrcTxt1" id="107"/>
+          <p:cNvSpPr txBox="true"/>
+          <p:nvPr/>
+        </p:nvSpPr>
+        <p:spPr>
+          <a:xfrm>
+            <a:off x="6395235" y="3140000"/>
+            <a:ext cx="5497529" cy="1500000"/>
+          </a:xfrm>
+          <a:prstGeom prst="rect">
+            <a:avLst/>
+          </a:prstGeom>
+        </p:spPr>
+        <p:txBody>
+          <a:bodyPr anchor="ctr" lIns="300000" rIns="240000" tIns="80000" bIns="80000"/>
+          <a:lstStyle/>
+          <a:p>
+            <a:pPr algn="l"/>
+            <a:r>
+              <a:rPr lang="en-US" sz="2600" b="true">
+                <a:solidFill>
+                  <a:srgbClr val="0B9FB0"/>
+                </a:solidFill>
+                <a:latin typeface="Arial"/>
+                <a:cs typeface="Arial"/>
+              </a:rPr>
+              <a:t>10,000  </a:t>
+            </a:r>
+            <a:r>
+              <a:rPr lang="en-US" sz="1700" b="true">
+                <a:solidFill>
+                  <a:srgbClr val="000000"/>
+                </a:solidFill>
+                <a:latin typeface="Arial"/>
+                <a:cs typeface="Arial"/>
+              </a:rPr>
+              <a:t>Incidents</a:t>
+            </a:r>
+          </a:p>
+          <a:p>
+            <a:pPr algn="l">
+              <a:lnSpc>
+                <a:spcPct val="106000"/>
+              </a:lnSpc>
+              <a:spcBef>
+                <a:spcPts val="400"/>
+              </a:spcBef>
             </a:pPr>
             <a:r>
-              <a:rPr lang="en-US" sz="3600" b="0" u="none" strike="noStrike">
+              <a:rPr lang="en-US" sz="1250">
+                <a:solidFill>
+                  <a:srgbClr val="333333"/>
+                </a:solidFill>
+                <a:latin typeface="Arial"/>
+                <a:cs typeface="Arial"/>
+              </a:rPr>
+              <a:t>severity, injuries, resolution hours and resolved flag, across Jan to Dec 2025</a:t>
+            </a:r>
+          </a:p>
+        </p:txBody>
+      </p:sp>
+      <p:sp>
+        <p:nvSpPr>
+          <p:cNvPr name="Src2" id="102"/>
+          <p:cNvSpPr/>
+          <p:nvPr/>
+        </p:nvSpPr>
+        <p:spPr>
+          <a:xfrm>
+            <a:off x="12172764" y="3140000"/>
+            <a:ext cx="5497529" cy="1500000"/>
+          </a:xfrm>
+          <a:prstGeom prst="rect">
+            <a:avLst/>
+          </a:prstGeom>
+          <a:solidFill>
+            <a:srgbClr val="FFFFFF"/>
+          </a:solidFill>
+          <a:ln w="12700">
+            <a:solidFill>
+              <a:srgbClr val="D9D9D9"/>
+            </a:solidFill>
+          </a:ln>
+        </p:spPr>
+        <p:txBody>
+          <a:bodyPr/>
+          <a:lstStyle/>
+          <a:p>
+            <a:endParaRPr lang="en-US"/>
+          </a:p>
+        </p:txBody>
+      </p:sp>
+      <p:sp>
+        <p:nvSpPr>
+          <p:cNvPr name="SrcAcc2" id="105"/>
+          <p:cNvSpPr/>
+          <p:nvPr/>
+        </p:nvSpPr>
+        <p:spPr>
+          <a:xfrm>
+            <a:off x="12172764" y="3140000"/>
+            <a:ext cx="90000" cy="1500000"/>
+          </a:xfrm>
+          <a:prstGeom prst="rect">
+            <a:avLst/>
+          </a:prstGeom>
+          <a:solidFill>
+            <a:srgbClr val="19E3F5"/>
+          </a:solidFill>
+          <a:ln>
+            <a:noFill/>
+          </a:ln>
+        </p:spPr>
+        <p:txBody>
+          <a:bodyPr/>
+          <a:lstStyle/>
+          <a:p>
+            <a:endParaRPr lang="en-US"/>
+          </a:p>
+        </p:txBody>
+      </p:sp>
+      <p:sp>
+        <p:nvSpPr>
+          <p:cNvPr name="SrcTxt2" id="108"/>
+          <p:cNvSpPr txBox="true"/>
+          <p:nvPr/>
+        </p:nvSpPr>
+        <p:spPr>
+          <a:xfrm>
+            <a:off x="12172764" y="3140000"/>
+            <a:ext cx="5497529" cy="1500000"/>
+          </a:xfrm>
+          <a:prstGeom prst="rect">
+            <a:avLst/>
+          </a:prstGeom>
+        </p:spPr>
+        <p:txBody>
+          <a:bodyPr anchor="ctr" lIns="300000" rIns="240000" tIns="80000" bIns="80000"/>
+          <a:lstStyle/>
+          <a:p>
+            <a:pPr algn="l"/>
+            <a:r>
+              <a:rPr lang="en-US" sz="2600" b="true">
+                <a:solidFill>
+                  <a:srgbClr val="0B9FB0"/>
+                </a:solidFill>
+                <a:latin typeface="Arial"/>
+                <a:cs typeface="Arial"/>
+              </a:rPr>
+              <a:t>8,000  </a:t>
+            </a:r>
+            <a:r>
+              <a:rPr lang="en-US" sz="1700" b="true">
                 <a:solidFill>
                   <a:srgbClr val="000000"/>
                 </a:solidFill>
-                <a:effectLst/>
-                <a:uFillTx/>
                 <a:latin typeface="Arial"/>
-                <a:ea typeface="Arial"/>
-              </a:rPr>
-              <a:t>Tables used and how they are joined</a:t>
-            </a:r>
-            <a:endParaRPr lang="en-IN" sz="3600" b="0" u="none" strike="noStrike">
-              <a:solidFill>
-                <a:srgbClr val="000000"/>
-              </a:solidFill>
-              <a:effectLst/>
-              <a:uFillTx/>
-              <a:latin typeface="Arial"/>
-            </a:endParaRPr>
-          </a:p>
-          <a:p>
-            <a:pPr marL="652680" lvl="1" indent="-326160" defTabSz="914400">
-              <a:lnSpc>
-                <a:spcPts val="4323"/>
-              </a:lnSpc>
-              <a:buClr>
-                <a:srgbClr val="000000"/>
-              </a:buClr>
-              <a:buFont typeface="Arial"/>
-              <a:buChar char="•"/>
+                <a:cs typeface="Arial"/>
+              </a:rPr>
+              <a:t>Public complaints</a:t>
+            </a:r>
+          </a:p>
+          <a:p>
+            <a:pPr algn="l">
+              <a:lnSpc>
+                <a:spcPct val="106000"/>
+              </a:lnSpc>
+              <a:spcBef>
+                <a:spcPts val="400"/>
+              </a:spcBef>
             </a:pPr>
             <a:r>
-              <a:rPr lang="en-US" sz="3600" b="0" u="none" strike="noStrike">
+              <a:rPr lang="en-US" sz="1250">
+                <a:solidFill>
+                  <a:srgbClr val="333333"/>
+                </a:solidFill>
+                <a:latin typeface="Arial"/>
+                <a:cs typeface="Arial"/>
+              </a:rPr>
+              <a:t>category, reported priority, status and days to resolution</a:t>
+            </a:r>
+          </a:p>
+        </p:txBody>
+      </p:sp>
+      <p:sp>
+        <p:nvSpPr>
+          <p:cNvPr name="ChartCard" id="110"/>
+          <p:cNvSpPr/>
+          <p:nvPr/>
+        </p:nvSpPr>
+        <p:spPr>
+          <a:xfrm>
+            <a:off x="617706" y="4820000"/>
+            <a:ext cx="9100000" cy="4330000"/>
+          </a:xfrm>
+          <a:prstGeom prst="rect">
+            <a:avLst/>
+          </a:prstGeom>
+          <a:solidFill>
+            <a:srgbClr val="FFFFFF"/>
+          </a:solidFill>
+          <a:ln w="12700">
+            <a:solidFill>
+              <a:srgbClr val="D9D9D9"/>
+            </a:solidFill>
+          </a:ln>
+        </p:spPr>
+        <p:txBody>
+          <a:bodyPr/>
+          <a:lstStyle/>
+          <a:p>
+            <a:endParaRPr lang="en-US"/>
+          </a:p>
+        </p:txBody>
+      </p:sp>
+      <p:sp>
+        <p:nvSpPr>
+          <p:cNvPr name="ChartTitle" id="111"/>
+          <p:cNvSpPr txBox="true"/>
+          <p:nvPr/>
+        </p:nvSpPr>
+        <p:spPr>
+          <a:xfrm>
+            <a:off x="817706" y="4950000"/>
+            <a:ext cx="8700000" cy="760000"/>
+          </a:xfrm>
+          <a:prstGeom prst="rect">
+            <a:avLst/>
+          </a:prstGeom>
+        </p:spPr>
+        <p:txBody>
+          <a:bodyPr anchor="t" lIns="0" rIns="0" tIns="0" bIns="0"/>
+          <a:lstStyle/>
+          <a:p>
+            <a:pPr algn="l"/>
+            <a:r>
+              <a:rPr lang="en-US" sz="1600" b="true">
                 <a:solidFill>
                   <a:srgbClr val="000000"/>
                 </a:solidFill>
-                <a:effectLst/>
-                <a:uFillTx/>
                 <a:latin typeface="Arial"/>
-                <a:ea typeface="Arial"/>
-              </a:rPr>
-              <a:t>Cleaning done and assumptions made</a:t>
-            </a:r>
-            <a:endParaRPr lang="en-IN" sz="3600" b="0" u="none" strike="noStrike">
-              <a:solidFill>
-                <a:srgbClr val="000000"/>
-              </a:solidFill>
-              <a:effectLst/>
-              <a:uFillTx/>
-              <a:latin typeface="Arial"/>
-            </a:endParaRPr>
-          </a:p>
-          <a:p>
-            <a:pPr marL="652680" lvl="1" indent="-326160" defTabSz="914400">
-              <a:lnSpc>
-                <a:spcPts val="4323"/>
-              </a:lnSpc>
-              <a:buClr>
-                <a:srgbClr val="000000"/>
-              </a:buClr>
-              <a:buFont typeface="Arial"/>
-              <a:buChar char="•"/>
+                <a:cs typeface="Arial"/>
+              </a:rPr>
+              <a:t>Resolution time is flat across severity (hrs)</a:t>
+            </a:r>
+          </a:p>
+          <a:p>
+            <a:pPr algn="l">
+              <a:spcBef>
+                <a:spcPts val="300"/>
+              </a:spcBef>
             </a:pPr>
             <a:r>
-              <a:rPr lang="en-US" sz="3600" b="0" u="none" strike="noStrike">
+              <a:rPr lang="en-US" sz="1300">
+                <a:solidFill>
+                  <a:srgbClr val="333333"/>
+                </a:solidFill>
+                <a:latin typeface="Arial"/>
+                <a:cs typeface="Arial"/>
+              </a:rPr>
+              <a:t>Critical spots are fixed no faster than Low.</a:t>
+            </a:r>
+          </a:p>
+        </p:txBody>
+      </p:sp>
+      <p:sp>
+        <p:nvSpPr>
+          <p:cNvPr name="Axis" id="112"/>
+          <p:cNvSpPr/>
+          <p:nvPr/>
+        </p:nvSpPr>
+        <p:spPr>
+          <a:xfrm>
+            <a:off x="1317706" y="8650000"/>
+            <a:ext cx="7900000" cy="16000"/>
+          </a:xfrm>
+          <a:prstGeom prst="rect">
+            <a:avLst/>
+          </a:prstGeom>
+          <a:solidFill>
+            <a:srgbClr val="BFBFBF"/>
+          </a:solidFill>
+          <a:ln>
+            <a:noFill/>
+          </a:ln>
+        </p:spPr>
+        <p:txBody>
+          <a:bodyPr/>
+          <a:lstStyle/>
+          <a:p>
+            <a:endParaRPr lang="en-US"/>
+          </a:p>
+        </p:txBody>
+      </p:sp>
+      <p:sp>
+        <p:nvSpPr>
+          <p:cNvPr name="Bar0" id="113"/>
+          <p:cNvSpPr/>
+          <p:nvPr/>
+        </p:nvSpPr>
+        <p:spPr>
+          <a:xfrm>
+            <a:off x="1317706" y="5995429"/>
+            <a:ext cx="1500000" cy="2654571"/>
+          </a:xfrm>
+          <a:prstGeom prst="rect">
+            <a:avLst/>
+          </a:prstGeom>
+          <a:solidFill>
+            <a:srgbClr val="9AEEF7"/>
+          </a:solidFill>
+          <a:ln>
+            <a:noFill/>
+          </a:ln>
+        </p:spPr>
+        <p:txBody>
+          <a:bodyPr/>
+          <a:lstStyle/>
+          <a:p>
+            <a:endParaRPr lang="en-US"/>
+          </a:p>
+        </p:txBody>
+      </p:sp>
+      <p:sp>
+        <p:nvSpPr>
+          <p:cNvPr name="Val0" id="117"/>
+          <p:cNvSpPr txBox="true"/>
+          <p:nvPr/>
+        </p:nvSpPr>
+        <p:spPr>
+          <a:xfrm>
+            <a:off x="1317706" y="5565429"/>
+            <a:ext cx="1500000" cy="400000"/>
+          </a:xfrm>
+          <a:prstGeom prst="rect">
+            <a:avLst/>
+          </a:prstGeom>
+        </p:spPr>
+        <p:txBody>
+          <a:bodyPr anchor="b" lIns="0" rIns="0" tIns="0" bIns="0"/>
+          <a:lstStyle/>
+          <a:p>
+            <a:pPr algn="ctr"/>
+            <a:r>
+              <a:rPr lang="en-US" sz="1500" b="true">
                 <a:solidFill>
                   <a:srgbClr val="000000"/>
                 </a:solidFill>
-                <a:effectLst/>
-                <a:uFillTx/>
                 <a:latin typeface="Arial"/>
-                <a:ea typeface="Arial"/>
-              </a:rPr>
-              <a:t>Key insights found</a:t>
-            </a:r>
-            <a:endParaRPr lang="en-IN" sz="3600" b="0" u="none" strike="noStrike">
-              <a:solidFill>
-                <a:srgbClr val="000000"/>
-              </a:solidFill>
-              <a:effectLst/>
-              <a:uFillTx/>
-              <a:latin typeface="Arial"/>
-            </a:endParaRPr>
+                <a:cs typeface="Arial"/>
+              </a:rPr>
+              <a:t>32.6</a:t>
+            </a:r>
+          </a:p>
+        </p:txBody>
+      </p:sp>
+      <p:sp>
+        <p:nvSpPr>
+          <p:cNvPr name="Cat0" id="121"/>
+          <p:cNvSpPr txBox="true"/>
+          <p:nvPr/>
+        </p:nvSpPr>
+        <p:spPr>
+          <a:xfrm>
+            <a:off x="1317706" y="8710000"/>
+            <a:ext cx="1500000" cy="360000"/>
+          </a:xfrm>
+          <a:prstGeom prst="rect">
+            <a:avLst/>
+          </a:prstGeom>
+        </p:spPr>
+        <p:txBody>
+          <a:bodyPr anchor="t" lIns="0" rIns="0" tIns="0" bIns="0"/>
+          <a:lstStyle/>
+          <a:p>
+            <a:pPr algn="ctr"/>
+            <a:r>
+              <a:rPr lang="en-US" sz="1400">
+                <a:solidFill>
+                  <a:srgbClr val="000000"/>
+                </a:solidFill>
+                <a:latin typeface="Arial"/>
+                <a:cs typeface="Arial"/>
+              </a:rPr>
+              <a:t>Low</a:t>
+            </a:r>
+          </a:p>
+        </p:txBody>
+      </p:sp>
+      <p:sp>
+        <p:nvSpPr>
+          <p:cNvPr name="Bar1" id="114"/>
+          <p:cNvSpPr/>
+          <p:nvPr/>
+        </p:nvSpPr>
+        <p:spPr>
+          <a:xfrm>
+            <a:off x="3451039" y="6068715"/>
+            <a:ext cx="1500000" cy="2581285"/>
+          </a:xfrm>
+          <a:prstGeom prst="rect">
+            <a:avLst/>
+          </a:prstGeom>
+          <a:solidFill>
+            <a:srgbClr val="9AEEF7"/>
+          </a:solidFill>
+          <a:ln>
+            <a:noFill/>
+          </a:ln>
+        </p:spPr>
+        <p:txBody>
+          <a:bodyPr/>
+          <a:lstStyle/>
+          <a:p>
+            <a:endParaRPr lang="en-US"/>
+          </a:p>
+        </p:txBody>
+      </p:sp>
+      <p:sp>
+        <p:nvSpPr>
+          <p:cNvPr name="Val1" id="118"/>
+          <p:cNvSpPr txBox="true"/>
+          <p:nvPr/>
+        </p:nvSpPr>
+        <p:spPr>
+          <a:xfrm>
+            <a:off x="3451039" y="5638715"/>
+            <a:ext cx="1500000" cy="400000"/>
+          </a:xfrm>
+          <a:prstGeom prst="rect">
+            <a:avLst/>
+          </a:prstGeom>
+        </p:spPr>
+        <p:txBody>
+          <a:bodyPr anchor="b" lIns="0" rIns="0" tIns="0" bIns="0"/>
+          <a:lstStyle/>
+          <a:p>
+            <a:pPr algn="ctr"/>
+            <a:r>
+              <a:rPr lang="en-US" sz="1500" b="true">
+                <a:solidFill>
+                  <a:srgbClr val="000000"/>
+                </a:solidFill>
+                <a:latin typeface="Arial"/>
+                <a:cs typeface="Arial"/>
+              </a:rPr>
+              <a:t>31.7</a:t>
+            </a:r>
+          </a:p>
+        </p:txBody>
+      </p:sp>
+      <p:sp>
+        <p:nvSpPr>
+          <p:cNvPr name="Cat1" id="122"/>
+          <p:cNvSpPr txBox="true"/>
+          <p:nvPr/>
+        </p:nvSpPr>
+        <p:spPr>
+          <a:xfrm>
+            <a:off x="3451039" y="8710000"/>
+            <a:ext cx="1500000" cy="360000"/>
+          </a:xfrm>
+          <a:prstGeom prst="rect">
+            <a:avLst/>
+          </a:prstGeom>
+        </p:spPr>
+        <p:txBody>
+          <a:bodyPr anchor="t" lIns="0" rIns="0" tIns="0" bIns="0"/>
+          <a:lstStyle/>
+          <a:p>
+            <a:pPr algn="ctr"/>
+            <a:r>
+              <a:rPr lang="en-US" sz="1400">
+                <a:solidFill>
+                  <a:srgbClr val="000000"/>
+                </a:solidFill>
+                <a:latin typeface="Arial"/>
+                <a:cs typeface="Arial"/>
+              </a:rPr>
+              <a:t>Medium</a:t>
+            </a:r>
+          </a:p>
+        </p:txBody>
+      </p:sp>
+      <p:sp>
+        <p:nvSpPr>
+          <p:cNvPr name="Bar2" id="115"/>
+          <p:cNvSpPr/>
+          <p:nvPr/>
+        </p:nvSpPr>
+        <p:spPr>
+          <a:xfrm>
+            <a:off x="5584372" y="5987286"/>
+            <a:ext cx="1500000" cy="2662714"/>
+          </a:xfrm>
+          <a:prstGeom prst="rect">
+            <a:avLst/>
+          </a:prstGeom>
+          <a:solidFill>
+            <a:srgbClr val="19E3F5"/>
+          </a:solidFill>
+          <a:ln>
+            <a:noFill/>
+          </a:ln>
+        </p:spPr>
+        <p:txBody>
+          <a:bodyPr/>
+          <a:lstStyle/>
+          <a:p>
+            <a:endParaRPr lang="en-US"/>
+          </a:p>
+        </p:txBody>
+      </p:sp>
+      <p:sp>
+        <p:nvSpPr>
+          <p:cNvPr name="Val2" id="119"/>
+          <p:cNvSpPr txBox="true"/>
+          <p:nvPr/>
+        </p:nvSpPr>
+        <p:spPr>
+          <a:xfrm>
+            <a:off x="5584372" y="5557286"/>
+            <a:ext cx="1500000" cy="400000"/>
+          </a:xfrm>
+          <a:prstGeom prst="rect">
+            <a:avLst/>
+          </a:prstGeom>
+        </p:spPr>
+        <p:txBody>
+          <a:bodyPr anchor="b" lIns="0" rIns="0" tIns="0" bIns="0"/>
+          <a:lstStyle/>
+          <a:p>
+            <a:pPr algn="ctr"/>
+            <a:r>
+              <a:rPr lang="en-US" sz="1500" b="true">
+                <a:solidFill>
+                  <a:srgbClr val="000000"/>
+                </a:solidFill>
+                <a:latin typeface="Arial"/>
+                <a:cs typeface="Arial"/>
+              </a:rPr>
+              <a:t>32.7</a:t>
+            </a:r>
+          </a:p>
+        </p:txBody>
+      </p:sp>
+      <p:sp>
+        <p:nvSpPr>
+          <p:cNvPr name="Cat2" id="123"/>
+          <p:cNvSpPr txBox="true"/>
+          <p:nvPr/>
+        </p:nvSpPr>
+        <p:spPr>
+          <a:xfrm>
+            <a:off x="5584372" y="8710000"/>
+            <a:ext cx="1500000" cy="360000"/>
+          </a:xfrm>
+          <a:prstGeom prst="rect">
+            <a:avLst/>
+          </a:prstGeom>
+        </p:spPr>
+        <p:txBody>
+          <a:bodyPr anchor="t" lIns="0" rIns="0" tIns="0" bIns="0"/>
+          <a:lstStyle/>
+          <a:p>
+            <a:pPr algn="ctr"/>
+            <a:r>
+              <a:rPr lang="en-US" sz="1400">
+                <a:solidFill>
+                  <a:srgbClr val="000000"/>
+                </a:solidFill>
+                <a:latin typeface="Arial"/>
+                <a:cs typeface="Arial"/>
+              </a:rPr>
+              <a:t>High</a:t>
+            </a:r>
+          </a:p>
+        </p:txBody>
+      </p:sp>
+      <p:sp>
+        <p:nvSpPr>
+          <p:cNvPr name="Bar3" id="116"/>
+          <p:cNvSpPr/>
+          <p:nvPr/>
+        </p:nvSpPr>
+        <p:spPr>
+          <a:xfrm>
+            <a:off x="7717706" y="6109429"/>
+            <a:ext cx="1500000" cy="2540571"/>
+          </a:xfrm>
+          <a:prstGeom prst="rect">
+            <a:avLst/>
+          </a:prstGeom>
+          <a:solidFill>
+            <a:srgbClr val="0B9FB0"/>
+          </a:solidFill>
+          <a:ln>
+            <a:noFill/>
+          </a:ln>
+        </p:spPr>
+        <p:txBody>
+          <a:bodyPr/>
+          <a:lstStyle/>
+          <a:p>
+            <a:endParaRPr lang="en-US"/>
+          </a:p>
+        </p:txBody>
+      </p:sp>
+      <p:sp>
+        <p:nvSpPr>
+          <p:cNvPr name="Val3" id="120"/>
+          <p:cNvSpPr txBox="true"/>
+          <p:nvPr/>
+        </p:nvSpPr>
+        <p:spPr>
+          <a:xfrm>
+            <a:off x="7717706" y="5679429"/>
+            <a:ext cx="1500000" cy="400000"/>
+          </a:xfrm>
+          <a:prstGeom prst="rect">
+            <a:avLst/>
+          </a:prstGeom>
+        </p:spPr>
+        <p:txBody>
+          <a:bodyPr anchor="b" lIns="0" rIns="0" tIns="0" bIns="0"/>
+          <a:lstStyle/>
+          <a:p>
+            <a:pPr algn="ctr"/>
+            <a:r>
+              <a:rPr lang="en-US" sz="1500" b="true">
+                <a:solidFill>
+                  <a:srgbClr val="000000"/>
+                </a:solidFill>
+                <a:latin typeface="Arial"/>
+                <a:cs typeface="Arial"/>
+              </a:rPr>
+              <a:t>31.2</a:t>
+            </a:r>
+          </a:p>
+        </p:txBody>
+      </p:sp>
+      <p:sp>
+        <p:nvSpPr>
+          <p:cNvPr name="Cat3" id="124"/>
+          <p:cNvSpPr txBox="true"/>
+          <p:nvPr/>
+        </p:nvSpPr>
+        <p:spPr>
+          <a:xfrm>
+            <a:off x="7717706" y="8710000"/>
+            <a:ext cx="1500000" cy="360000"/>
+          </a:xfrm>
+          <a:prstGeom prst="rect">
+            <a:avLst/>
+          </a:prstGeom>
+        </p:spPr>
+        <p:txBody>
+          <a:bodyPr anchor="t" lIns="0" rIns="0" tIns="0" bIns="0"/>
+          <a:lstStyle/>
+          <a:p>
+            <a:pPr algn="ctr"/>
+            <a:r>
+              <a:rPr lang="en-US" sz="1400">
+                <a:solidFill>
+                  <a:srgbClr val="000000"/>
+                </a:solidFill>
+                <a:latin typeface="Arial"/>
+                <a:cs typeface="Arial"/>
+              </a:rPr>
+              <a:t>Critical</a:t>
+            </a:r>
+          </a:p>
+        </p:txBody>
+      </p:sp>
+      <p:sp>
+        <p:nvSpPr>
+          <p:cNvPr name="DivCard" id="130"/>
+          <p:cNvSpPr/>
+          <p:nvPr/>
+        </p:nvSpPr>
+        <p:spPr>
+          <a:xfrm>
+            <a:off x="10017706" y="4820000"/>
+            <a:ext cx="7652588" cy="4330000"/>
+          </a:xfrm>
+          <a:prstGeom prst="rect">
+            <a:avLst/>
+          </a:prstGeom>
+          <a:solidFill>
+            <a:srgbClr val="FFFFFF"/>
+          </a:solidFill>
+          <a:ln w="12700">
+            <a:solidFill>
+              <a:srgbClr val="D9D9D9"/>
+            </a:solidFill>
+          </a:ln>
+        </p:spPr>
+        <p:txBody>
+          <a:bodyPr/>
+          <a:lstStyle/>
+          <a:p>
+            <a:endParaRPr lang="en-US"/>
+          </a:p>
+        </p:txBody>
+      </p:sp>
+      <p:sp>
+        <p:nvSpPr>
+          <p:cNvPr name="DivAcc" id="129"/>
+          <p:cNvSpPr/>
+          <p:nvPr/>
+        </p:nvSpPr>
+        <p:spPr>
+          <a:xfrm>
+            <a:off x="10017706" y="4820000"/>
+            <a:ext cx="90000" cy="4330000"/>
+          </a:xfrm>
+          <a:prstGeom prst="rect">
+            <a:avLst/>
+          </a:prstGeom>
+          <a:solidFill>
+            <a:srgbClr val="0B9FB0"/>
+          </a:solidFill>
+          <a:ln>
+            <a:noFill/>
+          </a:ln>
+        </p:spPr>
+        <p:txBody>
+          <a:bodyPr/>
+          <a:lstStyle/>
+          <a:p>
+            <a:endParaRPr lang="en-US"/>
+          </a:p>
+        </p:txBody>
+      </p:sp>
+      <p:sp>
+        <p:nvSpPr>
+          <p:cNvPr name="DivTitle" id="131"/>
+          <p:cNvSpPr txBox="true"/>
+          <p:nvPr/>
+        </p:nvSpPr>
+        <p:spPr>
+          <a:xfrm>
+            <a:off x="10277706" y="4950000"/>
+            <a:ext cx="7152588" cy="500000"/>
+          </a:xfrm>
+          <a:prstGeom prst="rect">
+            <a:avLst/>
+          </a:prstGeom>
+        </p:spPr>
+        <p:txBody>
+          <a:bodyPr anchor="t" lIns="0" rIns="0" tIns="0" bIns="0"/>
+          <a:lstStyle/>
+          <a:p>
+            <a:pPr algn="l"/>
+            <a:r>
+              <a:rPr lang="en-US" sz="1600" b="true">
+                <a:solidFill>
+                  <a:srgbClr val="000000"/>
+                </a:solidFill>
+                <a:latin typeface="Arial"/>
+                <a:cs typeface="Arial"/>
+              </a:rPr>
+              <a:t>Complaints vs real risk  (Module 3)</a:t>
+            </a:r>
+          </a:p>
+        </p:txBody>
+      </p:sp>
+      <p:sp>
+        <p:nvSpPr>
+          <p:cNvPr name="DivHead" id="132"/>
+          <p:cNvSpPr txBox="true"/>
+          <p:nvPr/>
+        </p:nvSpPr>
+        <p:spPr>
+          <a:xfrm>
+            <a:off x="10277706" y="5440000"/>
+            <a:ext cx="7152588" cy="900000"/>
+          </a:xfrm>
+          <a:prstGeom prst="rect">
+            <a:avLst/>
+          </a:prstGeom>
+        </p:spPr>
+        <p:txBody>
+          <a:bodyPr anchor="t" lIns="0" rIns="0" tIns="0" bIns="0"/>
+          <a:lstStyle/>
+          <a:p>
+            <a:pPr algn="l"/>
+            <a:r>
+              <a:rPr lang="en-US" sz="3000" b="true">
+                <a:solidFill>
+                  <a:srgbClr val="0B9FB0"/>
+                </a:solidFill>
+                <a:latin typeface="Arial"/>
+                <a:cs typeface="Arial"/>
+              </a:rPr>
+              <a:t>Nearly 1 in 2  </a:t>
+            </a:r>
+            <a:r>
+              <a:rPr lang="en-US" sz="2000" b="true">
+                <a:solidFill>
+                  <a:srgbClr val="000000"/>
+                </a:solidFill>
+                <a:latin typeface="Arial"/>
+                <a:cs typeface="Arial"/>
+              </a:rPr>
+              <a:t>locations</a:t>
+            </a:r>
+          </a:p>
+          <a:p>
+            <a:pPr algn="l">
+              <a:lnSpc>
+                <a:spcPct val="104000"/>
+              </a:lnSpc>
+              <a:spcBef>
+                <a:spcPts val="300"/>
+              </a:spcBef>
+            </a:pPr>
+            <a:r>
+              <a:rPr lang="en-US" sz="1300">
+                <a:solidFill>
+                  <a:srgbClr val="333333"/>
+                </a:solidFill>
+                <a:latin typeface="Arial"/>
+                <a:cs typeface="Arial"/>
+              </a:rPr>
+              <a:t>have complaints that do not match real incident risk.</a:t>
+            </a:r>
+          </a:p>
+        </p:txBody>
+      </p:sp>
+      <p:sp>
+        <p:nvSpPr>
+          <p:cNvPr name="Seg0" id="133"/>
+          <p:cNvSpPr/>
+          <p:nvPr/>
+        </p:nvSpPr>
+        <p:spPr>
+          <a:xfrm>
+            <a:off x="10277706" y="6770000"/>
+            <a:ext cx="1825942" cy="360000"/>
+          </a:xfrm>
+          <a:prstGeom prst="rect">
+            <a:avLst/>
+          </a:prstGeom>
+          <a:solidFill>
+            <a:srgbClr val="9AEEF7"/>
+          </a:solidFill>
+          <a:ln>
+            <a:noFill/>
+          </a:ln>
+        </p:spPr>
+        <p:txBody>
+          <a:bodyPr/>
+          <a:lstStyle/>
+          <a:p>
+            <a:endParaRPr lang="en-US"/>
+          </a:p>
+        </p:txBody>
+      </p:sp>
+      <p:sp>
+        <p:nvSpPr>
+          <p:cNvPr name="Seg1" id="134"/>
+          <p:cNvSpPr/>
+          <p:nvPr/>
+        </p:nvSpPr>
+        <p:spPr>
+          <a:xfrm>
+            <a:off x="12103648" y="6770000"/>
+            <a:ext cx="3644752" cy="360000"/>
+          </a:xfrm>
+          <a:prstGeom prst="rect">
+            <a:avLst/>
+          </a:prstGeom>
+          <a:solidFill>
+            <a:srgbClr val="19E3F5"/>
+          </a:solidFill>
+          <a:ln>
+            <a:noFill/>
+          </a:ln>
+        </p:spPr>
+        <p:txBody>
+          <a:bodyPr/>
+          <a:lstStyle/>
+          <a:p>
+            <a:endParaRPr lang="en-US"/>
+          </a:p>
+        </p:txBody>
+      </p:sp>
+      <p:sp>
+        <p:nvSpPr>
+          <p:cNvPr name="Seg2" id="135"/>
+          <p:cNvSpPr/>
+          <p:nvPr/>
+        </p:nvSpPr>
+        <p:spPr>
+          <a:xfrm>
+            <a:off x="15748400" y="6770000"/>
+            <a:ext cx="1661894" cy="360000"/>
+          </a:xfrm>
+          <a:prstGeom prst="rect">
+            <a:avLst/>
+          </a:prstGeom>
+          <a:solidFill>
+            <a:srgbClr val="0B9FB0"/>
+          </a:solidFill>
+          <a:ln>
+            <a:noFill/>
+          </a:ln>
+        </p:spPr>
+        <p:txBody>
+          <a:bodyPr/>
+          <a:lstStyle/>
+          <a:p>
+            <a:endParaRPr lang="en-US"/>
+          </a:p>
+        </p:txBody>
+      </p:sp>
+      <p:sp>
+        <p:nvSpPr>
+          <p:cNvPr name="Chip0" id="136"/>
+          <p:cNvSpPr/>
+          <p:nvPr/>
+        </p:nvSpPr>
+        <p:spPr>
+          <a:xfrm>
+            <a:off x="10277706" y="7410000"/>
+            <a:ext cx="230000" cy="230000"/>
+          </a:xfrm>
+          <a:prstGeom prst="rect">
+            <a:avLst/>
+          </a:prstGeom>
+          <a:solidFill>
+            <a:srgbClr val="9AEEF7"/>
+          </a:solidFill>
+          <a:ln>
+            <a:noFill/>
+          </a:ln>
+        </p:spPr>
+        <p:txBody>
+          <a:bodyPr/>
+          <a:lstStyle/>
+          <a:p>
+            <a:endParaRPr lang="en-US"/>
+          </a:p>
+        </p:txBody>
+      </p:sp>
+      <p:sp>
+        <p:nvSpPr>
+          <p:cNvPr name="Leg0" id="139"/>
+          <p:cNvSpPr txBox="true"/>
+          <p:nvPr/>
+        </p:nvSpPr>
+        <p:spPr>
+          <a:xfrm>
+            <a:off x="10637706" y="7370000"/>
+            <a:ext cx="6772588" cy="520000"/>
+          </a:xfrm>
+          <a:prstGeom prst="rect">
+            <a:avLst/>
+          </a:prstGeom>
+        </p:spPr>
+        <p:txBody>
+          <a:bodyPr anchor="ctr" lIns="0" rIns="0" tIns="0" bIns="0"/>
+          <a:lstStyle/>
+          <a:p>
+            <a:pPr algn="l"/>
+            <a:r>
+              <a:rPr lang="en-US" sz="1350" b="true">
+                <a:solidFill>
+                  <a:srgbClr val="000000"/>
+                </a:solidFill>
+                <a:latin typeface="Arial"/>
+                <a:cs typeface="Arial"/>
+              </a:rPr>
+              <a:t>25.6%  </a:t>
+            </a:r>
+            <a:r>
+              <a:rPr lang="en-US" sz="1350">
+                <a:solidFill>
+                  <a:srgbClr val="333333"/>
+                </a:solidFill>
+                <a:latin typeface="Arial"/>
+                <a:cs typeface="Arial"/>
+              </a:rPr>
+              <a:t>Over-reported: loud complaints, low real risk</a:t>
+            </a:r>
+          </a:p>
+        </p:txBody>
+      </p:sp>
+      <p:sp>
+        <p:nvSpPr>
+          <p:cNvPr name="Chip1" id="137"/>
+          <p:cNvSpPr/>
+          <p:nvPr/>
+        </p:nvSpPr>
+        <p:spPr>
+          <a:xfrm>
+            <a:off x="10277706" y="7930000"/>
+            <a:ext cx="230000" cy="230000"/>
+          </a:xfrm>
+          <a:prstGeom prst="rect">
+            <a:avLst/>
+          </a:prstGeom>
+          <a:solidFill>
+            <a:srgbClr val="19E3F5"/>
+          </a:solidFill>
+          <a:ln>
+            <a:noFill/>
+          </a:ln>
+        </p:spPr>
+        <p:txBody>
+          <a:bodyPr/>
+          <a:lstStyle/>
+          <a:p>
+            <a:endParaRPr lang="en-US"/>
+          </a:p>
+        </p:txBody>
+      </p:sp>
+      <p:sp>
+        <p:nvSpPr>
+          <p:cNvPr name="Leg1" id="140"/>
+          <p:cNvSpPr txBox="true"/>
+          <p:nvPr/>
+        </p:nvSpPr>
+        <p:spPr>
+          <a:xfrm>
+            <a:off x="10637706" y="7890000"/>
+            <a:ext cx="6772588" cy="520000"/>
+          </a:xfrm>
+          <a:prstGeom prst="rect">
+            <a:avLst/>
+          </a:prstGeom>
+        </p:spPr>
+        <p:txBody>
+          <a:bodyPr anchor="ctr" lIns="0" rIns="0" tIns="0" bIns="0"/>
+          <a:lstStyle/>
+          <a:p>
+            <a:pPr algn="l"/>
+            <a:r>
+              <a:rPr lang="en-US" sz="1350" b="true">
+                <a:solidFill>
+                  <a:srgbClr val="000000"/>
+                </a:solidFill>
+                <a:latin typeface="Arial"/>
+                <a:cs typeface="Arial"/>
+              </a:rPr>
+              <a:t>51.1%  </a:t>
+            </a:r>
+            <a:r>
+              <a:rPr lang="en-US" sz="1350">
+                <a:solidFill>
+                  <a:srgbClr val="333333"/>
+                </a:solidFill>
+                <a:latin typeface="Arial"/>
+                <a:cs typeface="Arial"/>
+              </a:rPr>
+              <a:t>Aligned: complaints track real risk</a:t>
+            </a:r>
+          </a:p>
+        </p:txBody>
+      </p:sp>
+      <p:sp>
+        <p:nvSpPr>
+          <p:cNvPr name="Chip2" id="138"/>
+          <p:cNvSpPr/>
+          <p:nvPr/>
+        </p:nvSpPr>
+        <p:spPr>
+          <a:xfrm>
+            <a:off x="10277706" y="8450000"/>
+            <a:ext cx="230000" cy="230000"/>
+          </a:xfrm>
+          <a:prstGeom prst="rect">
+            <a:avLst/>
+          </a:prstGeom>
+          <a:solidFill>
+            <a:srgbClr val="0B9FB0"/>
+          </a:solidFill>
+          <a:ln>
+            <a:noFill/>
+          </a:ln>
+        </p:spPr>
+        <p:txBody>
+          <a:bodyPr/>
+          <a:lstStyle/>
+          <a:p>
+            <a:endParaRPr lang="en-US"/>
+          </a:p>
+        </p:txBody>
+      </p:sp>
+      <p:sp>
+        <p:nvSpPr>
+          <p:cNvPr name="Leg2" id="141"/>
+          <p:cNvSpPr txBox="true"/>
+          <p:nvPr/>
+        </p:nvSpPr>
+        <p:spPr>
+          <a:xfrm>
+            <a:off x="10637706" y="8410000"/>
+            <a:ext cx="6772588" cy="520000"/>
+          </a:xfrm>
+          <a:prstGeom prst="rect">
+            <a:avLst/>
+          </a:prstGeom>
+        </p:spPr>
+        <p:txBody>
+          <a:bodyPr anchor="ctr" lIns="0" rIns="0" tIns="0" bIns="0"/>
+          <a:lstStyle/>
+          <a:p>
+            <a:pPr algn="l"/>
+            <a:r>
+              <a:rPr lang="en-US" sz="1350" b="true">
+                <a:solidFill>
+                  <a:srgbClr val="000000"/>
+                </a:solidFill>
+                <a:latin typeface="Arial"/>
+                <a:cs typeface="Arial"/>
+              </a:rPr>
+              <a:t>23.3%  </a:t>
+            </a:r>
+            <a:r>
+              <a:rPr lang="en-US" sz="1350">
+                <a:solidFill>
+                  <a:srgbClr val="333333"/>
+                </a:solidFill>
+                <a:latin typeface="Arial"/>
+                <a:cs typeface="Arial"/>
+              </a:rPr>
+              <a:t>Under-reported: real risk, few complaints</a:t>
+            </a:r>
           </a:p>
         </p:txBody>
       </p:sp>
     </p:spTree>
   </p:cSld>
-  <mc:AlternateContent>
-    <mc:Choice Requires="p14">
-      <p:transition spd="slow" p14:dur="2000"/>
-    </mc:Choice>
-    <mc:Fallback>
-      <p:transition spd="slow"/>
-    </mc:Fallback>
-  </mc:AlternateContent>
+  <p:clrMapOvr>
+    <a:masterClrMapping/>
+  </p:clrMapOvr>
 </p:sld>
 </file>
 
@@ -14145,7 +15082,7 @@
 </file>
 
 <file path=ppt/slides/slide6.xml><?xml version="1.0" encoding="utf-8"?>
-<p:sld xmlns:a="http://schemas.openxmlformats.org/drawingml/2006/main" xmlns:p="http://schemas.openxmlformats.org/presentationml/2006/main" xmlns:r="http://schemas.openxmlformats.org/officeDocument/2006/relationships" xmlns:p14="http://schemas.microsoft.com/office/powerpoint/2010/main" xmlns:p15="http://schemas.microsoft.com/office/powerpoint/2012/main" xmlns:mc="http://schemas.openxmlformats.org/markup-compatibility/2006">
+<p:sld xmlns:p="http://schemas.openxmlformats.org/presentationml/2006/main" xmlns:a="http://schemas.openxmlformats.org/drawingml/2006/main" xmlns:r="http://schemas.openxmlformats.org/officeDocument/2006/relationships">
   <p:cSld>
     <p:spTree>
       <p:nvGrpSpPr>
@@ -14163,42 +15100,37 @@
       </p:grpSpPr>
       <p:grpSp>
         <p:nvGrpSpPr>
-          <p:cNvPr id="179" name="Group 2"/>
+          <p:cNvPr name="Group 2" id="2"/>
           <p:cNvGrpSpPr/>
           <p:nvPr/>
         </p:nvGrpSpPr>
         <p:grpSpPr>
-          <a:xfrm>
-            <a:off x="2676600" y="321840"/>
-            <a:ext cx="12902760" cy="1325160"/>
-            <a:chOff x="2676600" y="321840"/>
-            <a:chExt cx="12902760" cy="1325160"/>
+          <a:xfrm rot="0">
+            <a:off x="2676716" y="343167"/>
+            <a:ext cx="12903117" cy="1304039"/>
+            <a:chOff x="0" y="0"/>
+            <a:chExt cx="17204157" cy="1738719"/>
           </a:xfrm>
         </p:grpSpPr>
         <p:sp>
           <p:nvSpPr>
-            <p:cNvPr id="180" name="Freeform 3"/>
+            <p:cNvPr name="Freeform 3" id="3"/>
             <p:cNvSpPr/>
             <p:nvPr/>
           </p:nvSpPr>
           <p:spPr>
-            <a:xfrm>
-              <a:off x="2676600" y="343080"/>
-              <a:ext cx="12902760" cy="1303560"/>
+            <a:xfrm flipH="false" flipV="false" rot="0">
+              <a:off x="0" y="0"/>
+              <a:ext cx="17204161" cy="1738718"/>
             </a:xfrm>
             <a:custGeom>
               <a:avLst/>
-              <a:gdLst>
-                <a:gd name="textAreaLeft" fmla="*/ 0 w 12902760"/>
-                <a:gd name="textAreaRight" fmla="*/ 12903120 w 12902760"/>
-                <a:gd name="textAreaTop" fmla="*/ 0 h 1303560"/>
-                <a:gd name="textAreaBottom" fmla="*/ 1303920 h 1303560"/>
-              </a:gdLst>
+              <a:gdLst/>
               <a:ahLst/>
               <a:cxnLst/>
-              <a:rect l="textAreaLeft" t="textAreaTop" r="textAreaRight" b="textAreaBottom"/>
+              <a:rect r="r" b="b" t="t" l="l"/>
               <a:pathLst>
-                <a:path w="17204161" h="1738718">
+                <a:path h="1738718" w="17204161">
                   <a:moveTo>
                     <a:pt x="0" y="0"/>
                   </a:moveTo>
@@ -14215,137 +15147,89 @@
                 </a:path>
               </a:pathLst>
             </a:custGeom>
-            <a:blipFill rotWithShape="0">
-              <a:blip r:embed="rId1">
+            <a:blipFill>
+              <a:blip r:embed="rId2">
                 <a:alphaModFix amt="0"/>
               </a:blip>
-              <a:srcRect/>
-              <a:stretch/>
+              <a:stretch>
+                <a:fillRect l="0" t="-142799" r="0" b="-142799"/>
+              </a:stretch>
             </a:blipFill>
-            <a:ln w="0">
-              <a:noFill/>
-            </a:ln>
           </p:spPr>
-          <p:style>
-            <a:lnRef idx="0"/>
-            <a:fillRef idx="0"/>
-            <a:effectRef idx="0"/>
-            <a:fontRef idx="minor"/>
-          </p:style>
-          <p:txBody>
-            <a:bodyPr lIns="90000" tIns="45000" rIns="90000" bIns="45000" anchor="t">
-              <a:noAutofit/>
-            </a:bodyPr>
-            <a:p>
-              <a:pPr/>
-              <a:endParaRPr lang="en-IN" sz="1800" b="0" u="none" strike="noStrike">
-                <a:solidFill>
-                  <a:srgbClr val="FFFFFF"/>
-                </a:solidFill>
-                <a:effectLst/>
-                <a:uFillTx/>
-                <a:latin typeface="Arial"/>
-              </a:endParaRPr>
-            </a:p>
-          </p:txBody>
         </p:sp>
         <p:sp>
           <p:nvSpPr>
-            <p:cNvPr id="181" name="TextBox 4"/>
-            <p:cNvSpPr/>
+            <p:cNvPr name="TextBox 4" id="4"/>
+            <p:cNvSpPr txBox="true"/>
             <p:nvPr/>
           </p:nvSpPr>
           <p:spPr>
             <a:xfrm>
-              <a:off x="2676600" y="321840"/>
-              <a:ext cx="12902760" cy="1325160"/>
+              <a:off x="0" y="-28575"/>
+              <a:ext cx="17204157" cy="1767294"/>
             </a:xfrm>
             <a:prstGeom prst="rect">
               <a:avLst/>
             </a:prstGeom>
-            <a:noFill/>
-            <a:ln w="0">
-              <a:noFill/>
-            </a:ln>
           </p:spPr>
-          <p:style>
-            <a:lnRef idx="0"/>
-            <a:fillRef idx="0"/>
-            <a:effectRef idx="0"/>
-            <a:fontRef idx="minor"/>
-          </p:style>
           <p:txBody>
-            <a:bodyPr lIns="0" tIns="0" rIns="0" bIns="0" anchor="ctr">
-              <a:noAutofit/>
-            </a:bodyPr>
+            <a:bodyPr anchor="ctr" rtlCol="false" tIns="0" lIns="0" bIns="0" rIns="0"/>
+            <a:lstStyle/>
             <a:p>
-              <a:pPr algn="ctr" defTabSz="914400">
+              <a:pPr algn="ctr">
                 <a:lnSpc>
-                  <a:spcPts val="5403"/>
+                  <a:spcPts val="5404"/>
                 </a:lnSpc>
               </a:pPr>
               <a:r>
-                <a:rPr lang="en-US" sz="4500" b="0" u="none" strike="noStrike">
+                <a:rPr lang="en-US" sz="4503">
                   <a:solidFill>
                     <a:srgbClr val="000000"/>
                   </a:solidFill>
-                  <a:effectLst/>
-                  <a:uFillTx/>
                   <a:latin typeface="Arial"/>
                   <a:ea typeface="Arial"/>
+                  <a:cs typeface="Arial"/>
+                  <a:sym typeface="Arial"/>
                 </a:rPr>
                 <a:t>BASE PROTOTYPE &amp; MVP</a:t>
               </a:r>
-              <a:endParaRPr lang="en-IN" sz="4500" b="0" u="none" strike="noStrike">
-                <a:solidFill>
-                  <a:srgbClr val="000000"/>
-                </a:solidFill>
-                <a:effectLst/>
-                <a:uFillTx/>
-                <a:latin typeface="Arial"/>
-              </a:endParaRPr>
             </a:p>
           </p:txBody>
         </p:sp>
       </p:grpSp>
       <p:grpSp>
         <p:nvGrpSpPr>
-          <p:cNvPr id="182" name="Group 5"/>
+          <p:cNvPr name="Group 5" id="5"/>
           <p:cNvGrpSpPr/>
           <p:nvPr/>
         </p:nvGrpSpPr>
         <p:grpSpPr>
-          <a:xfrm>
-            <a:off x="617760" y="205920"/>
-            <a:ext cx="1717920" cy="1372320"/>
-            <a:chOff x="617760" y="205920"/>
-            <a:chExt cx="1717920" cy="1372320"/>
+          <a:xfrm rot="0">
+            <a:off x="617706" y="205902"/>
+            <a:ext cx="1718386" cy="1372676"/>
+            <a:chOff x="0" y="0"/>
+            <a:chExt cx="2291182" cy="1830235"/>
           </a:xfrm>
         </p:grpSpPr>
         <p:sp>
           <p:nvSpPr>
-            <p:cNvPr id="183" name="Freeform 6" descr="logo-dsc-light.png"/>
+            <p:cNvPr name="Freeform 6" id="6" descr="logo-dsc-light.png"/>
             <p:cNvSpPr/>
             <p:nvPr/>
           </p:nvSpPr>
           <p:spPr>
-            <a:xfrm>
-              <a:off x="617760" y="205920"/>
-              <a:ext cx="1717920" cy="1372320"/>
+            <a:xfrm flipH="false" flipV="false" rot="0">
+              <a:off x="0" y="0"/>
+              <a:ext cx="2291207" cy="1830197"/>
             </a:xfrm>
             <a:custGeom>
               <a:avLst/>
-              <a:gdLst>
-                <a:gd name="textAreaLeft" fmla="*/ 0 w 1717920"/>
-                <a:gd name="textAreaRight" fmla="*/ 1718280 w 1717920"/>
-                <a:gd name="textAreaTop" fmla="*/ 0 h 1372320"/>
-                <a:gd name="textAreaBottom" fmla="*/ 1372680 h 1372320"/>
-              </a:gdLst>
+              <a:gdLst/>
               <a:ahLst/>
               <a:cxnLst/>
-              <a:rect l="textAreaLeft" t="textAreaTop" r="textAreaRight" b="textAreaBottom"/>
+              <a:rect r="r" b="b" t="t" l="l"/>
               <a:pathLst>
-                <a:path w="2291207" h="1830197">
+                <a:path h="1830197" w="2291207">
                   <a:moveTo>
                     <a:pt x="0" y="0"/>
                   </a:moveTo>
@@ -14365,77 +15249,48 @@
                 </a:path>
               </a:pathLst>
             </a:custGeom>
-            <a:blipFill rotWithShape="0">
-              <a:blip r:embed="rId2"/>
-              <a:srcRect/>
-              <a:stretch/>
+            <a:blipFill>
+              <a:blip r:embed="rId3"/>
+              <a:stretch>
+                <a:fillRect l="0" t="0" r="1" b="-2"/>
+              </a:stretch>
             </a:blipFill>
-            <a:ln w="0">
-              <a:noFill/>
-            </a:ln>
           </p:spPr>
-          <p:style>
-            <a:lnRef idx="0"/>
-            <a:fillRef idx="0"/>
-            <a:effectRef idx="0"/>
-            <a:fontRef idx="minor"/>
-          </p:style>
-          <p:txBody>
-            <a:bodyPr lIns="90000" tIns="45000" rIns="90000" bIns="45000" anchor="t">
-              <a:noAutofit/>
-            </a:bodyPr>
-            <a:p>
-              <a:pPr/>
-              <a:endParaRPr lang="en-IN" sz="1800" b="0" u="none" strike="noStrike">
-                <a:solidFill>
-                  <a:srgbClr val="FFFFFF"/>
-                </a:solidFill>
-                <a:effectLst/>
-                <a:uFillTx/>
-                <a:latin typeface="Arial"/>
-              </a:endParaRPr>
-            </a:p>
-          </p:txBody>
         </p:sp>
       </p:grpSp>
       <p:grpSp>
         <p:nvGrpSpPr>
-          <p:cNvPr id="184" name="Group 7"/>
+          <p:cNvPr name="Group 7" id="7"/>
           <p:cNvGrpSpPr/>
           <p:nvPr/>
         </p:nvGrpSpPr>
         <p:grpSpPr>
-          <a:xfrm>
-            <a:off x="15373800" y="480600"/>
-            <a:ext cx="2248200" cy="850680"/>
-            <a:chOff x="15373800" y="480600"/>
-            <a:chExt cx="2248200" cy="850680"/>
+          <a:xfrm rot="0">
+            <a:off x="15373931" y="480431"/>
+            <a:ext cx="2248529" cy="851059"/>
+            <a:chOff x="0" y="0"/>
+            <a:chExt cx="2998038" cy="1134745"/>
           </a:xfrm>
         </p:grpSpPr>
         <p:sp>
           <p:nvSpPr>
-            <p:cNvPr id="185" name="Freeform 8" descr="logo-iiec-light.png"/>
+            <p:cNvPr name="Freeform 8" id="8" descr="logo-iiec-light.png"/>
             <p:cNvSpPr/>
             <p:nvPr/>
           </p:nvSpPr>
           <p:spPr>
-            <a:xfrm>
-              <a:off x="15373800" y="480600"/>
-              <a:ext cx="2248200" cy="850680"/>
+            <a:xfrm flipH="false" flipV="false" rot="0">
+              <a:off x="0" y="0"/>
+              <a:ext cx="2998089" cy="1134745"/>
             </a:xfrm>
             <a:custGeom>
               <a:avLst/>
-              <a:gdLst>
-                <a:gd name="textAreaLeft" fmla="*/ 0 w 2248200"/>
-                <a:gd name="textAreaRight" fmla="*/ 2248560 w 2248200"/>
-                <a:gd name="textAreaTop" fmla="*/ 0 h 850680"/>
-                <a:gd name="textAreaBottom" fmla="*/ 851040 h 850680"/>
-              </a:gdLst>
+              <a:gdLst/>
               <a:ahLst/>
               <a:cxnLst/>
-              <a:rect l="textAreaLeft" t="textAreaTop" r="textAreaRight" b="textAreaBottom"/>
+              <a:rect r="r" b="b" t="t" l="l"/>
               <a:pathLst>
-                <a:path w="2998089" h="1134745">
+                <a:path h="1134745" w="2998089">
                   <a:moveTo>
                     <a:pt x="0" y="0"/>
                   </a:moveTo>
@@ -14455,77 +15310,48 @@
                 </a:path>
               </a:pathLst>
             </a:custGeom>
-            <a:blipFill rotWithShape="0">
-              <a:blip r:embed="rId3"/>
-              <a:srcRect/>
-              <a:stretch/>
+            <a:blipFill>
+              <a:blip r:embed="rId4"/>
+              <a:stretch>
+                <a:fillRect l="0" t="0" r="1" b="0"/>
+              </a:stretch>
             </a:blipFill>
-            <a:ln w="0">
-              <a:noFill/>
-            </a:ln>
           </p:spPr>
-          <p:style>
-            <a:lnRef idx="0"/>
-            <a:fillRef idx="0"/>
-            <a:effectRef idx="0"/>
-            <a:fontRef idx="minor"/>
-          </p:style>
-          <p:txBody>
-            <a:bodyPr lIns="90000" tIns="45000" rIns="90000" bIns="45000" anchor="t">
-              <a:noAutofit/>
-            </a:bodyPr>
-            <a:p>
-              <a:pPr/>
-              <a:endParaRPr lang="en-IN" sz="1800" b="0" u="none" strike="noStrike">
-                <a:solidFill>
-                  <a:srgbClr val="FFFFFF"/>
-                </a:solidFill>
-                <a:effectLst/>
-                <a:uFillTx/>
-                <a:latin typeface="Arial"/>
-              </a:endParaRPr>
-            </a:p>
-          </p:txBody>
         </p:sp>
       </p:grpSp>
       <p:grpSp>
         <p:nvGrpSpPr>
-          <p:cNvPr id="186" name="Group 9"/>
+          <p:cNvPr name="Group 9" id="9"/>
           <p:cNvGrpSpPr/>
           <p:nvPr/>
         </p:nvGrpSpPr>
         <p:grpSpPr>
-          <a:xfrm>
-            <a:off x="0" y="9540000"/>
-            <a:ext cx="18301320" cy="754560"/>
-            <a:chOff x="0" y="9540000"/>
-            <a:chExt cx="18301320" cy="754560"/>
+          <a:xfrm rot="0">
+            <a:off x="0" y="9540069"/>
+            <a:ext cx="18301840" cy="754971"/>
+            <a:chOff x="0" y="0"/>
+            <a:chExt cx="24402453" cy="1006627"/>
           </a:xfrm>
         </p:grpSpPr>
         <p:sp>
           <p:nvSpPr>
-            <p:cNvPr id="187" name="Freeform 10"/>
+            <p:cNvPr name="Freeform 10" id="10"/>
             <p:cNvSpPr/>
             <p:nvPr/>
           </p:nvSpPr>
           <p:spPr>
-            <a:xfrm>
-              <a:off x="0" y="9540000"/>
-              <a:ext cx="18301320" cy="754560"/>
+            <a:xfrm flipH="false" flipV="false" rot="0">
+              <a:off x="0" y="0"/>
+              <a:ext cx="24402414" cy="1006602"/>
             </a:xfrm>
             <a:custGeom>
               <a:avLst/>
-              <a:gdLst>
-                <a:gd name="textAreaLeft" fmla="*/ 0 w 18301320"/>
-                <a:gd name="textAreaRight" fmla="*/ 18301680 w 18301320"/>
-                <a:gd name="textAreaTop" fmla="*/ 0 h 754560"/>
-                <a:gd name="textAreaBottom" fmla="*/ 754920 h 754560"/>
-              </a:gdLst>
+              <a:gdLst/>
               <a:ahLst/>
               <a:cxnLst/>
-              <a:rect l="textAreaLeft" t="textAreaTop" r="textAreaRight" b="textAreaBottom"/>
+              <a:rect r="r" b="b" t="t" l="l"/>
               <a:pathLst>
-                <a:path w="24402414" h="1006602">
+                <a:path h="1006602" w="24402414">
                   <a:moveTo>
                     <a:pt x="0" y="0"/>
                   </a:moveTo>
@@ -14545,72 +15371,42 @@
             <a:solidFill>
               <a:srgbClr val="19E3F5"/>
             </a:solidFill>
-            <a:ln w="0">
-              <a:noFill/>
-            </a:ln>
           </p:spPr>
-          <p:style>
-            <a:lnRef idx="0"/>
-            <a:fillRef idx="0"/>
-            <a:effectRef idx="0"/>
-            <a:fontRef idx="minor"/>
-          </p:style>
-          <p:txBody>
-            <a:bodyPr lIns="90000" tIns="45000" rIns="90000" bIns="45000" anchor="t">
-              <a:noAutofit/>
-            </a:bodyPr>
-            <a:p>
-              <a:pPr/>
-              <a:endParaRPr lang="en-IN" sz="1800" b="0" u="none" strike="noStrike">
-                <a:solidFill>
-                  <a:srgbClr val="000000"/>
-                </a:solidFill>
-                <a:effectLst/>
-                <a:uFillTx/>
-                <a:latin typeface="Arial"/>
-              </a:endParaRPr>
-            </a:p>
-          </p:txBody>
         </p:sp>
       </p:grpSp>
       <p:grpSp>
         <p:nvGrpSpPr>
-          <p:cNvPr id="188" name="Group 11"/>
+          <p:cNvPr name="Group 11" id="11"/>
           <p:cNvGrpSpPr/>
           <p:nvPr/>
         </p:nvGrpSpPr>
         <p:grpSpPr>
-          <a:xfrm>
-            <a:off x="0" y="9525960"/>
-            <a:ext cx="18301320" cy="768960"/>
-            <a:chOff x="0" y="9525960"/>
-            <a:chExt cx="18301320" cy="768960"/>
+          <a:xfrm rot="0">
+            <a:off x="0" y="9540069"/>
+            <a:ext cx="18301840" cy="754971"/>
+            <a:chOff x="0" y="0"/>
+            <a:chExt cx="24402453" cy="1006627"/>
           </a:xfrm>
         </p:grpSpPr>
         <p:sp>
           <p:nvSpPr>
-            <p:cNvPr id="189" name="Freeform 12"/>
+            <p:cNvPr name="Freeform 12" id="12"/>
             <p:cNvSpPr/>
             <p:nvPr/>
           </p:nvSpPr>
           <p:spPr>
-            <a:xfrm>
-              <a:off x="0" y="9540000"/>
-              <a:ext cx="18301320" cy="754560"/>
+            <a:xfrm flipH="false" flipV="false" rot="0">
+              <a:off x="0" y="0"/>
+              <a:ext cx="24402455" cy="1006626"/>
             </a:xfrm>
             <a:custGeom>
               <a:avLst/>
-              <a:gdLst>
-                <a:gd name="textAreaLeft" fmla="*/ 0 w 18301320"/>
-                <a:gd name="textAreaRight" fmla="*/ 18301680 w 18301320"/>
-                <a:gd name="textAreaTop" fmla="*/ 0 h 754560"/>
-                <a:gd name="textAreaBottom" fmla="*/ 754920 h 754560"/>
-              </a:gdLst>
+              <a:gdLst/>
               <a:ahLst/>
               <a:cxnLst/>
-              <a:rect l="textAreaLeft" t="textAreaTop" r="textAreaRight" b="textAreaBottom"/>
+              <a:rect r="r" b="b" t="t" l="l"/>
               <a:pathLst>
-                <a:path w="24402455" h="1006626">
+                <a:path h="1006626" w="24402455">
                   <a:moveTo>
                     <a:pt x="0" y="0"/>
                   </a:moveTo>
@@ -14627,137 +15423,89 @@
                 </a:path>
               </a:pathLst>
             </a:custGeom>
-            <a:blipFill rotWithShape="0">
-              <a:blip r:embed="rId4">
+            <a:blipFill>
+              <a:blip r:embed="rId2">
                 <a:alphaModFix amt="0"/>
               </a:blip>
-              <a:srcRect/>
-              <a:stretch/>
+              <a:stretch>
+                <a:fillRect l="0" t="-422352" r="0" b="-422352"/>
+              </a:stretch>
             </a:blipFill>
-            <a:ln w="0">
-              <a:noFill/>
-            </a:ln>
           </p:spPr>
-          <p:style>
-            <a:lnRef idx="0"/>
-            <a:fillRef idx="0"/>
-            <a:effectRef idx="0"/>
-            <a:fontRef idx="minor"/>
-          </p:style>
-          <p:txBody>
-            <a:bodyPr lIns="90000" tIns="45000" rIns="90000" bIns="45000" anchor="t">
-              <a:noAutofit/>
-            </a:bodyPr>
-            <a:p>
-              <a:pPr/>
-              <a:endParaRPr lang="en-IN" sz="1800" b="0" u="none" strike="noStrike">
-                <a:solidFill>
-                  <a:srgbClr val="FFFFFF"/>
-                </a:solidFill>
-                <a:effectLst/>
-                <a:uFillTx/>
-                <a:latin typeface="Arial"/>
-              </a:endParaRPr>
-            </a:p>
-          </p:txBody>
         </p:sp>
         <p:sp>
           <p:nvSpPr>
-            <p:cNvPr id="190" name="TextBox 13"/>
-            <p:cNvSpPr/>
+            <p:cNvPr name="TextBox 13" id="13"/>
+            <p:cNvSpPr txBox="true"/>
             <p:nvPr/>
           </p:nvSpPr>
           <p:spPr>
             <a:xfrm>
-              <a:off x="0" y="9525960"/>
-              <a:ext cx="18301320" cy="768960"/>
+              <a:off x="0" y="-19050"/>
+              <a:ext cx="24402453" cy="1025677"/>
             </a:xfrm>
             <a:prstGeom prst="rect">
               <a:avLst/>
             </a:prstGeom>
-            <a:noFill/>
-            <a:ln w="0">
-              <a:noFill/>
-            </a:ln>
           </p:spPr>
-          <p:style>
-            <a:lnRef idx="0"/>
-            <a:fillRef idx="0"/>
-            <a:effectRef idx="0"/>
-            <a:fontRef idx="minor"/>
-          </p:style>
           <p:txBody>
-            <a:bodyPr lIns="0" tIns="0" rIns="0" bIns="0" anchor="ctr">
-              <a:noAutofit/>
-            </a:bodyPr>
+            <a:bodyPr anchor="ctr" rtlCol="false" tIns="0" lIns="0" bIns="0" rIns="0"/>
+            <a:lstStyle/>
             <a:p>
-              <a:pPr algn="ctr" defTabSz="914400">
+              <a:pPr algn="ctr">
                 <a:lnSpc>
-                  <a:spcPts val="2160"/>
+                  <a:spcPts val="2161"/>
                 </a:lnSpc>
               </a:pPr>
               <a:r>
-                <a:rPr lang="en-US" sz="1800" b="1" u="none" strike="noStrike">
+                <a:rPr lang="en-US" sz="1801" b="true">
                   <a:solidFill>
                     <a:srgbClr val="000000"/>
                   </a:solidFill>
-                  <a:effectLst/>
-                  <a:uFillTx/>
                   <a:latin typeface="Arial Bold"/>
                   <a:ea typeface="Arial Bold"/>
+                  <a:cs typeface="Arial Bold"/>
+                  <a:sym typeface="Arial Bold"/>
                 </a:rPr>
                 <a:t>DATATHON 2026  ·  Round 1 Idea Submission – Template</a:t>
               </a:r>
-              <a:endParaRPr lang="en-IN" sz="1800" b="0" u="none" strike="noStrike">
-                <a:solidFill>
-                  <a:srgbClr val="000000"/>
-                </a:solidFill>
-                <a:effectLst/>
-                <a:uFillTx/>
-                <a:latin typeface="Arial"/>
-              </a:endParaRPr>
             </a:p>
           </p:txBody>
         </p:sp>
       </p:grpSp>
       <p:grpSp>
         <p:nvGrpSpPr>
-          <p:cNvPr id="191" name="Group 14"/>
+          <p:cNvPr name="Group 14" id="14"/>
           <p:cNvGrpSpPr/>
           <p:nvPr/>
         </p:nvGrpSpPr>
         <p:grpSpPr>
-          <a:xfrm>
-            <a:off x="16334640" y="9525960"/>
-            <a:ext cx="1509480" cy="768960"/>
-            <a:chOff x="16334640" y="9525960"/>
-            <a:chExt cx="1509480" cy="768960"/>
+          <a:xfrm rot="0">
+            <a:off x="16334804" y="9540069"/>
+            <a:ext cx="1509941" cy="754971"/>
+            <a:chOff x="0" y="0"/>
+            <a:chExt cx="2013255" cy="1006627"/>
           </a:xfrm>
         </p:grpSpPr>
         <p:sp>
           <p:nvSpPr>
-            <p:cNvPr id="192" name="Freeform 15"/>
+            <p:cNvPr name="Freeform 15" id="15"/>
             <p:cNvSpPr/>
             <p:nvPr/>
           </p:nvSpPr>
           <p:spPr>
-            <a:xfrm>
-              <a:off x="16334640" y="9540000"/>
-              <a:ext cx="1509480" cy="754560"/>
+            <a:xfrm flipH="false" flipV="false" rot="0">
+              <a:off x="0" y="0"/>
+              <a:ext cx="2013253" cy="1006626"/>
             </a:xfrm>
             <a:custGeom>
               <a:avLst/>
-              <a:gdLst>
-                <a:gd name="textAreaLeft" fmla="*/ 0 w 1509480"/>
-                <a:gd name="textAreaRight" fmla="*/ 1509840 w 1509480"/>
-                <a:gd name="textAreaTop" fmla="*/ 0 h 754560"/>
-                <a:gd name="textAreaBottom" fmla="*/ 754920 h 754560"/>
-              </a:gdLst>
+              <a:gdLst/>
               <a:ahLst/>
               <a:cxnLst/>
-              <a:rect l="textAreaLeft" t="textAreaTop" r="textAreaRight" b="textAreaBottom"/>
+              <a:rect r="r" b="b" t="t" l="l"/>
               <a:pathLst>
-                <a:path w="2013253" h="1006626">
+                <a:path h="1006626" w="2013253">
                   <a:moveTo>
                     <a:pt x="0" y="0"/>
                   </a:moveTo>
@@ -14774,419 +15522,1158 @@
                 </a:path>
               </a:pathLst>
             </a:custGeom>
-            <a:blipFill rotWithShape="0">
-              <a:blip r:embed="rId5">
+            <a:blipFill>
+              <a:blip r:embed="rId2">
                 <a:alphaModFix amt="0"/>
               </a:blip>
-              <a:srcRect/>
-              <a:stretch/>
+              <a:stretch>
+                <a:fillRect l="-14151" t="0" r="-14151" b="0"/>
+              </a:stretch>
             </a:blipFill>
-            <a:ln w="0">
-              <a:noFill/>
-            </a:ln>
           </p:spPr>
-          <p:style>
-            <a:lnRef idx="0"/>
-            <a:fillRef idx="0"/>
-            <a:effectRef idx="0"/>
-            <a:fontRef idx="minor"/>
-          </p:style>
-          <p:txBody>
-            <a:bodyPr lIns="90000" tIns="45000" rIns="90000" bIns="45000" anchor="t">
-              <a:noAutofit/>
-            </a:bodyPr>
-            <a:p>
-              <a:pPr/>
-              <a:endParaRPr lang="en-IN" sz="1800" b="0" u="none" strike="noStrike">
-                <a:solidFill>
-                  <a:srgbClr val="FFFFFF"/>
-                </a:solidFill>
-                <a:effectLst/>
-                <a:uFillTx/>
-                <a:latin typeface="Arial"/>
-              </a:endParaRPr>
-            </a:p>
-          </p:txBody>
         </p:sp>
         <p:sp>
           <p:nvSpPr>
-            <p:cNvPr id="193" name="TextBox 16"/>
-            <p:cNvSpPr/>
+            <p:cNvPr name="TextBox 16" id="16"/>
+            <p:cNvSpPr txBox="true"/>
             <p:nvPr/>
           </p:nvSpPr>
           <p:spPr>
             <a:xfrm>
-              <a:off x="16334640" y="9525960"/>
-              <a:ext cx="1509480" cy="768960"/>
+              <a:off x="0" y="-19050"/>
+              <a:ext cx="2013255" cy="1025677"/>
             </a:xfrm>
             <a:prstGeom prst="rect">
               <a:avLst/>
             </a:prstGeom>
-            <a:noFill/>
-            <a:ln w="0">
-              <a:noFill/>
-            </a:ln>
           </p:spPr>
-          <p:style>
-            <a:lnRef idx="0"/>
-            <a:fillRef idx="0"/>
-            <a:effectRef idx="0"/>
-            <a:fontRef idx="minor"/>
-          </p:style>
           <p:txBody>
-            <a:bodyPr lIns="0" tIns="0" rIns="0" bIns="0" anchor="ctr">
-              <a:noAutofit/>
-            </a:bodyPr>
+            <a:bodyPr anchor="ctr" rtlCol="false" tIns="0" lIns="0" bIns="0" rIns="0"/>
+            <a:lstStyle/>
             <a:p>
-              <a:pPr algn="r" defTabSz="914400">
+              <a:pPr algn="r">
                 <a:lnSpc>
                   <a:spcPts val="2341"/>
                 </a:lnSpc>
               </a:pPr>
               <a:r>
-                <a:rPr lang="en-US" sz="1950" b="1" u="none" strike="noStrike">
+                <a:rPr lang="en-US" sz="1951" b="true">
                   <a:solidFill>
                     <a:srgbClr val="000000"/>
                   </a:solidFill>
-                  <a:effectLst/>
-                  <a:uFillTx/>
                   <a:latin typeface="Arial Bold"/>
                   <a:ea typeface="Arial Bold"/>
+                  <a:cs typeface="Arial Bold"/>
+                  <a:sym typeface="Arial Bold"/>
                 </a:rPr>
                 <a:t>6</a:t>
               </a:r>
-              <a:endParaRPr lang="en-IN" sz="1950" b="0" u="none" strike="noStrike">
-                <a:solidFill>
-                  <a:srgbClr val="000000"/>
-                </a:solidFill>
-                <a:effectLst/>
-                <a:uFillTx/>
-                <a:latin typeface="Arial"/>
-              </a:endParaRPr>
             </a:p>
           </p:txBody>
         </p:sp>
       </p:grpSp>
       <p:sp>
         <p:nvSpPr>
-          <p:cNvPr id="194" name="TextBox 17"/>
+          <p:cNvPr name="TextBox 17" id="17"/>
+          <p:cNvSpPr txBox="true"/>
+          <p:nvPr/>
+        </p:nvSpPr>
+        <p:spPr>
+          <a:xfrm rot="0">
+            <a:off x="915048" y="2291582"/>
+            <a:ext cx="16426453" cy="751218"/>
+          </a:xfrm>
+          <a:prstGeom prst="rect">
+            <a:avLst/>
+          </a:prstGeom>
+        </p:spPr>
+        <p:txBody>
+          <a:bodyPr anchor="t" rtlCol="false" tIns="0" lIns="0" bIns="0" rIns="0">
+            <a:spAutoFit/>
+          </a:bodyPr>
+          <a:lstStyle/>
+          <a:p>
+            <a:pPr algn="l">
+              <a:lnSpc>
+                <a:spcPts val="5043"/>
+              </a:lnSpc>
+            </a:pPr>
+            <a:r>
+              <a:rPr lang="en-US" sz="4203" b="true">
+                <a:solidFill>
+                  <a:srgbClr val="000000"/>
+                </a:solidFill>
+                <a:latin typeface="Arial Bold"/>
+                <a:ea typeface="Arial Bold"/>
+                <a:cs typeface="Arial Bold"/>
+                <a:sym typeface="Arial Bold"/>
+              </a:rPr>
+              <a:t>❖ </a:t>
+            </a:r>
+            <a:r>
+              <a:rPr lang="en-US" b="true" sz="4203" u="sng">
+                <a:solidFill>
+                  <a:srgbClr val="000000"/>
+                </a:solidFill>
+                <a:latin typeface="Arial Bold"/>
+                <a:ea typeface="Arial Bold"/>
+                <a:cs typeface="Arial Bold"/>
+                <a:sym typeface="Arial Bold"/>
+              </a:rPr>
+              <a:t>Base Prototype (Round 1)</a:t>
+            </a:r>
+          </a:p>
+        </p:txBody>
+      </p:sp>
+      <p:sp>
+        <p:nvSpPr>
+          <p:cNvPr name="BuiltCard0" id="100"/>
           <p:cNvSpPr/>
           <p:nvPr/>
         </p:nvSpPr>
         <p:spPr>
           <a:xfrm>
-            <a:off x="915120" y="2291760"/>
-            <a:ext cx="16426080" cy="750960"/>
-          </a:xfrm>
-          <a:prstGeom prst="rect">
-            <a:avLst/>
-          </a:prstGeom>
-          <a:noFill/>
-          <a:ln w="0">
+            <a:off x="617706" y="3140000"/>
+            <a:ext cx="5497529" cy="1400000"/>
+          </a:xfrm>
+          <a:prstGeom prst="rect">
+            <a:avLst/>
+          </a:prstGeom>
+          <a:solidFill>
+            <a:srgbClr val="FFFFFF"/>
+          </a:solidFill>
+          <a:ln w="12700">
+            <a:solidFill>
+              <a:srgbClr val="D9D9D9"/>
+            </a:solidFill>
+          </a:ln>
+        </p:spPr>
+        <p:txBody>
+          <a:bodyPr/>
+          <a:lstStyle/>
+          <a:p>
+            <a:endParaRPr lang="en-US"/>
+          </a:p>
+        </p:txBody>
+      </p:sp>
+      <p:sp>
+        <p:nvSpPr>
+          <p:cNvPr name="BuiltAcc0" id="103"/>
+          <p:cNvSpPr/>
+          <p:nvPr/>
+        </p:nvSpPr>
+        <p:spPr>
+          <a:xfrm>
+            <a:off x="617706" y="3140000"/>
+            <a:ext cx="90000" cy="1400000"/>
+          </a:xfrm>
+          <a:prstGeom prst="rect">
+            <a:avLst/>
+          </a:prstGeom>
+          <a:solidFill>
+            <a:srgbClr val="19E3F5"/>
+          </a:solidFill>
+          <a:ln>
             <a:noFill/>
           </a:ln>
         </p:spPr>
-        <p:style>
-          <a:lnRef idx="0"/>
-          <a:fillRef idx="0"/>
-          <a:effectRef idx="0"/>
-          <a:fontRef idx="minor"/>
-        </p:style>
-        <p:txBody>
-          <a:bodyPr lIns="0" tIns="0" rIns="0" bIns="0" anchor="t">
+        <p:txBody>
+          <a:bodyPr/>
+          <a:lstStyle/>
+          <a:p>
+            <a:endParaRPr lang="en-US"/>
+          </a:p>
+        </p:txBody>
+      </p:sp>
+      <p:sp>
+        <p:nvSpPr>
+          <p:cNvPr name="BuiltTxt0" id="106"/>
+          <p:cNvSpPr txBox="true"/>
+          <p:nvPr/>
+        </p:nvSpPr>
+        <p:spPr>
+          <a:xfrm>
+            <a:off x="617706" y="3140000"/>
+            <a:ext cx="5497529" cy="1400000"/>
+          </a:xfrm>
+          <a:prstGeom prst="rect">
+            <a:avLst/>
+          </a:prstGeom>
+        </p:spPr>
+        <p:txBody>
+          <a:bodyPr anchor="ctr" lIns="300000" rIns="240000" tIns="70000" bIns="70000"/>
+          <a:lstStyle/>
+          <a:p>
+            <a:pPr algn="l"/>
+            <a:r>
+              <a:rPr lang="en-US" sz="1600" b="true">
+                <a:solidFill>
+                  <a:srgbClr val="000000"/>
+                </a:solidFill>
+                <a:latin typeface="Arial"/>
+                <a:cs typeface="Arial"/>
+              </a:rPr>
+              <a:t>Priority ranking   </a:t>
+            </a:r>
+            <a:r>
+              <a:rPr lang="en-US" sz="1100" b="true">
+                <a:solidFill>
+                  <a:srgbClr val="0B9FB0"/>
+                </a:solidFill>
+                <a:latin typeface="Arial"/>
+                <a:cs typeface="Arial"/>
+              </a:rPr>
+              <a:t>Module 1</a:t>
+            </a:r>
+          </a:p>
+          <a:p>
+            <a:pPr algn="l">
+              <a:lnSpc>
+                <a:spcPct val="106000"/>
+              </a:lnSpc>
+              <a:spcBef>
+                <a:spcPts val="500"/>
+              </a:spcBef>
+            </a:pPr>
+            <a:r>
+              <a:rPr lang="en-US" sz="1300">
+                <a:solidFill>
+                  <a:srgbClr val="333333"/>
+                </a:solidFill>
+                <a:latin typeface="Arial"/>
+                <a:cs typeface="Arial"/>
+              </a:rPr>
+              <a:t>Every location scored and ranked by real risk, with a confidence band so teams see how sure the model is.</a:t>
+            </a:r>
+          </a:p>
+        </p:txBody>
+      </p:sp>
+      <p:sp>
+        <p:nvSpPr>
+          <p:cNvPr name="BuiltCard1" id="101"/>
+          <p:cNvSpPr/>
+          <p:nvPr/>
+        </p:nvSpPr>
+        <p:spPr>
+          <a:xfrm>
+            <a:off x="6395235" y="3140000"/>
+            <a:ext cx="5497529" cy="1400000"/>
+          </a:xfrm>
+          <a:prstGeom prst="rect">
+            <a:avLst/>
+          </a:prstGeom>
+          <a:solidFill>
+            <a:srgbClr val="FFFFFF"/>
+          </a:solidFill>
+          <a:ln w="12700">
+            <a:solidFill>
+              <a:srgbClr val="D9D9D9"/>
+            </a:solidFill>
+          </a:ln>
+        </p:spPr>
+        <p:txBody>
+          <a:bodyPr/>
+          <a:lstStyle/>
+          <a:p>
+            <a:endParaRPr lang="en-US"/>
+          </a:p>
+        </p:txBody>
+      </p:sp>
+      <p:sp>
+        <p:nvSpPr>
+          <p:cNvPr name="BuiltAcc1" id="104"/>
+          <p:cNvSpPr/>
+          <p:nvPr/>
+        </p:nvSpPr>
+        <p:spPr>
+          <a:xfrm>
+            <a:off x="6395235" y="3140000"/>
+            <a:ext cx="90000" cy="1400000"/>
+          </a:xfrm>
+          <a:prstGeom prst="rect">
+            <a:avLst/>
+          </a:prstGeom>
+          <a:solidFill>
+            <a:srgbClr val="19E3F5"/>
+          </a:solidFill>
+          <a:ln>
+            <a:noFill/>
+          </a:ln>
+        </p:spPr>
+        <p:txBody>
+          <a:bodyPr/>
+          <a:lstStyle/>
+          <a:p>
+            <a:endParaRPr lang="en-US"/>
+          </a:p>
+        </p:txBody>
+      </p:sp>
+      <p:sp>
+        <p:nvSpPr>
+          <p:cNvPr name="BuiltTxt1" id="107"/>
+          <p:cNvSpPr txBox="true"/>
+          <p:nvPr/>
+        </p:nvSpPr>
+        <p:spPr>
+          <a:xfrm>
+            <a:off x="6395235" y="3140000"/>
+            <a:ext cx="5497529" cy="1400000"/>
+          </a:xfrm>
+          <a:prstGeom prst="rect">
+            <a:avLst/>
+          </a:prstGeom>
+        </p:spPr>
+        <p:txBody>
+          <a:bodyPr anchor="ctr" lIns="300000" rIns="240000" tIns="70000" bIns="70000"/>
+          <a:lstStyle/>
+          <a:p>
+            <a:pPr algn="l"/>
+            <a:r>
+              <a:rPr lang="en-US" sz="1600" b="true">
+                <a:solidFill>
+                  <a:srgbClr val="000000"/>
+                </a:solidFill>
+                <a:latin typeface="Arial"/>
+                <a:cs typeface="Arial"/>
+              </a:rPr>
+              <a:t>Blind-spot map   </a:t>
+            </a:r>
+            <a:r>
+              <a:rPr lang="en-US" sz="1100" b="true">
+                <a:solidFill>
+                  <a:srgbClr val="0B9FB0"/>
+                </a:solidFill>
+                <a:latin typeface="Arial"/>
+                <a:cs typeface="Arial"/>
+              </a:rPr>
+              <a:t>Module 3</a:t>
+            </a:r>
+          </a:p>
+          <a:p>
+            <a:pPr algn="l">
+              <a:lnSpc>
+                <a:spcPct val="106000"/>
+              </a:lnSpc>
+              <a:spcBef>
+                <a:spcPts val="500"/>
+              </a:spcBef>
+            </a:pPr>
+            <a:r>
+              <a:rPr lang="en-US" sz="1300">
+                <a:solidFill>
+                  <a:srgbClr val="333333"/>
+                </a:solidFill>
+                <a:latin typeface="Arial"/>
+                <a:cs typeface="Arial"/>
+              </a:rPr>
+              <a:t>Flags where complaints and real incident risk disagree, surfacing under-reported danger spots.</a:t>
+            </a:r>
+          </a:p>
+        </p:txBody>
+      </p:sp>
+      <p:sp>
+        <p:nvSpPr>
+          <p:cNvPr name="BuiltCard2" id="102"/>
+          <p:cNvSpPr/>
+          <p:nvPr/>
+        </p:nvSpPr>
+        <p:spPr>
+          <a:xfrm>
+            <a:off x="12172764" y="3140000"/>
+            <a:ext cx="5497529" cy="1400000"/>
+          </a:xfrm>
+          <a:prstGeom prst="rect">
+            <a:avLst/>
+          </a:prstGeom>
+          <a:solidFill>
+            <a:srgbClr val="FFFFFF"/>
+          </a:solidFill>
+          <a:ln w="12700">
+            <a:solidFill>
+              <a:srgbClr val="D9D9D9"/>
+            </a:solidFill>
+          </a:ln>
+        </p:spPr>
+        <p:txBody>
+          <a:bodyPr/>
+          <a:lstStyle/>
+          <a:p>
+            <a:endParaRPr lang="en-US"/>
+          </a:p>
+        </p:txBody>
+      </p:sp>
+      <p:sp>
+        <p:nvSpPr>
+          <p:cNvPr name="BuiltAcc2" id="105"/>
+          <p:cNvSpPr/>
+          <p:nvPr/>
+        </p:nvSpPr>
+        <p:spPr>
+          <a:xfrm>
+            <a:off x="12172764" y="3140000"/>
+            <a:ext cx="90000" cy="1400000"/>
+          </a:xfrm>
+          <a:prstGeom prst="rect">
+            <a:avLst/>
+          </a:prstGeom>
+          <a:solidFill>
+            <a:srgbClr val="19E3F5"/>
+          </a:solidFill>
+          <a:ln>
+            <a:noFill/>
+          </a:ln>
+        </p:spPr>
+        <p:txBody>
+          <a:bodyPr/>
+          <a:lstStyle/>
+          <a:p>
+            <a:endParaRPr lang="en-US"/>
+          </a:p>
+        </p:txBody>
+      </p:sp>
+      <p:sp>
+        <p:nvSpPr>
+          <p:cNvPr name="BuiltTxt2" id="108"/>
+          <p:cNvSpPr txBox="true"/>
+          <p:nvPr/>
+        </p:nvSpPr>
+        <p:spPr>
+          <a:xfrm>
+            <a:off x="12172764" y="3140000"/>
+            <a:ext cx="5497529" cy="1400000"/>
+          </a:xfrm>
+          <a:prstGeom prst="rect">
+            <a:avLst/>
+          </a:prstGeom>
+        </p:spPr>
+        <p:txBody>
+          <a:bodyPr anchor="ctr" lIns="300000" rIns="240000" tIns="70000" bIns="70000"/>
+          <a:lstStyle/>
+          <a:p>
+            <a:pPr algn="l"/>
+            <a:r>
+              <a:rPr lang="en-US" sz="1600" b="true">
+                <a:solidFill>
+                  <a:srgbClr val="000000"/>
+                </a:solidFill>
+                <a:latin typeface="Arial"/>
+                <a:cs typeface="Arial"/>
+              </a:rPr>
+              <a:t>Web dashboard   </a:t>
+            </a:r>
+            <a:r>
+              <a:rPr lang="en-US" sz="1100" b="true">
+                <a:solidFill>
+                  <a:srgbClr val="0B9FB0"/>
+                </a:solidFill>
+                <a:latin typeface="Arial"/>
+                <a:cs typeface="Arial"/>
+              </a:rPr>
+              <a:t>Built</a:t>
+            </a:r>
+          </a:p>
+          <a:p>
+            <a:pPr algn="l">
+              <a:lnSpc>
+                <a:spcPct val="106000"/>
+              </a:lnSpc>
+              <a:spcBef>
+                <a:spcPts val="500"/>
+              </a:spcBef>
+            </a:pPr>
+            <a:r>
+              <a:rPr lang="en-US" sz="1300">
+                <a:solidFill>
+                  <a:srgbClr val="333333"/>
+                </a:solidFill>
+                <a:latin typeface="Arial"/>
+                <a:cs typeface="Arial"/>
+              </a:rPr>
+              <a:t>A simple ranked map and list over the dataset, ready to explore all 1,000 locations.</a:t>
+            </a:r>
+          </a:p>
+        </p:txBody>
+      </p:sp>
+      <p:sp>
+        <p:nvSpPr>
+          <p:cNvPr name="TextBox 19" id="19"/>
+          <p:cNvSpPr txBox="true"/>
+          <p:nvPr/>
+        </p:nvSpPr>
+        <p:spPr>
+          <a:xfrm rot="0">
+            <a:off x="915048" y="4720000"/>
+            <a:ext cx="16426453" cy="751218"/>
+          </a:xfrm>
+          <a:prstGeom prst="rect">
+            <a:avLst/>
+          </a:prstGeom>
+        </p:spPr>
+        <p:txBody>
+          <a:bodyPr anchor="t" rtlCol="false" tIns="0" lIns="0" bIns="0" rIns="0">
             <a:spAutoFit/>
           </a:bodyPr>
-          <a:p>
-            <a:pPr defTabSz="914400">
+          <a:lstStyle/>
+          <a:p>
+            <a:pPr algn="l">
               <a:lnSpc>
                 <a:spcPts val="5043"/>
               </a:lnSpc>
             </a:pPr>
             <a:r>
-              <a:rPr lang="en-US" sz="4200" b="1" u="none" strike="noStrike">
+              <a:rPr lang="en-US" sz="4203" b="true">
                 <a:solidFill>
                   <a:srgbClr val="000000"/>
                 </a:solidFill>
-                <a:effectLst/>
-                <a:uFillTx/>
                 <a:latin typeface="Arial Bold"/>
                 <a:ea typeface="Arial Bold"/>
+                <a:cs typeface="Arial Bold"/>
+                <a:sym typeface="Arial Bold"/>
               </a:rPr>
               <a:t>❖ </a:t>
             </a:r>
             <a:r>
-              <a:rPr lang="en-US" sz="4200" b="1" u="sng" strike="noStrike">
+              <a:rPr lang="en-US" b="true" sz="4203" u="sng">
                 <a:solidFill>
                   <a:srgbClr val="000000"/>
                 </a:solidFill>
-                <a:effectLst/>
-                <a:uFillTx/>
                 <a:latin typeface="Arial Bold"/>
                 <a:ea typeface="Arial Bold"/>
-              </a:rPr>
-              <a:t>Base Prototype (Round 1)</a:t>
-            </a:r>
-            <a:endParaRPr lang="en-IN" sz="4200" b="0" u="none" strike="noStrike">
-              <a:solidFill>
-                <a:srgbClr val="000000"/>
-              </a:solidFill>
-              <a:effectLst/>
-              <a:uFillTx/>
-              <a:latin typeface="Arial"/>
-            </a:endParaRPr>
-          </a:p>
-        </p:txBody>
-      </p:sp>
-      <p:sp>
-        <p:nvSpPr>
-          <p:cNvPr id="195" name="TextBox 18"/>
+                <a:cs typeface="Arial Bold"/>
+                <a:sym typeface="Arial Bold"/>
+              </a:rPr>
+              <a:t>MVP for Round 2</a:t>
+            </a:r>
+            <a:r>
+              <a:rPr lang="en-US" sz="4203">
+                <a:solidFill>
+                  <a:srgbClr val="555555"/>
+                </a:solidFill>
+                <a:latin typeface="Arial"/>
+                <a:ea typeface="Arial"/>
+                <a:cs typeface="Arial"/>
+                <a:sym typeface="Arial"/>
+              </a:rPr>
+              <a:t>   (Mandatory)</a:t>
+            </a:r>
+          </a:p>
+        </p:txBody>
+      </p:sp>
+      <p:sp>
+        <p:nvSpPr>
+          <p:cNvPr name="Mod2Card" id="120"/>
           <p:cNvSpPr/>
           <p:nvPr/>
         </p:nvSpPr>
         <p:spPr>
           <a:xfrm>
-            <a:off x="915120" y="3311640"/>
-            <a:ext cx="16426080" cy="1309320"/>
-          </a:xfrm>
-          <a:prstGeom prst="rect">
-            <a:avLst/>
-          </a:prstGeom>
-          <a:noFill/>
-          <a:ln w="0">
+            <a:off x="617706" y="5560000"/>
+            <a:ext cx="8326294" cy="2050000"/>
+          </a:xfrm>
+          <a:prstGeom prst="rect">
+            <a:avLst/>
+          </a:prstGeom>
+          <a:solidFill>
+            <a:srgbClr val="FFFFFF"/>
+          </a:solidFill>
+          <a:ln w="12700">
+            <a:solidFill>
+              <a:srgbClr val="D9D9D9"/>
+            </a:solidFill>
+          </a:ln>
+        </p:spPr>
+        <p:txBody>
+          <a:bodyPr/>
+          <a:lstStyle/>
+          <a:p>
+            <a:endParaRPr lang="en-US"/>
+          </a:p>
+        </p:txBody>
+      </p:sp>
+      <p:sp>
+        <p:nvSpPr>
+          <p:cNvPr name="Mod2Acc" id="121"/>
+          <p:cNvSpPr/>
+          <p:nvPr/>
+        </p:nvSpPr>
+        <p:spPr>
+          <a:xfrm>
+            <a:off x="617706" y="5560000"/>
+            <a:ext cx="90000" cy="2050000"/>
+          </a:xfrm>
+          <a:prstGeom prst="rect">
+            <a:avLst/>
+          </a:prstGeom>
+          <a:solidFill>
+            <a:srgbClr val="19E3F5"/>
+          </a:solidFill>
+          <a:ln>
             <a:noFill/>
           </a:ln>
         </p:spPr>
-        <p:style>
-          <a:lnRef idx="0"/>
-          <a:fillRef idx="0"/>
-          <a:effectRef idx="0"/>
-          <a:fontRef idx="minor"/>
-        </p:style>
-        <p:txBody>
-          <a:bodyPr lIns="0" tIns="0" rIns="0" bIns="0" anchor="t">
-            <a:spAutoFit/>
-          </a:bodyPr>
-          <a:p>
-            <a:pPr marL="652680" lvl="1" indent="-326160" defTabSz="914400">
-              <a:lnSpc>
-                <a:spcPts val="4323"/>
-              </a:lnSpc>
-              <a:buClr>
-                <a:srgbClr val="000000"/>
-              </a:buClr>
-              <a:buFont typeface="Arial"/>
-              <a:buChar char="•"/>
+        <p:txBody>
+          <a:bodyPr/>
+          <a:lstStyle/>
+          <a:p>
+            <a:endParaRPr lang="en-US"/>
+          </a:p>
+        </p:txBody>
+      </p:sp>
+      <p:sp>
+        <p:nvSpPr>
+          <p:cNvPr name="Mod2Txt" id="122"/>
+          <p:cNvSpPr txBox="true"/>
+          <p:nvPr/>
+        </p:nvSpPr>
+        <p:spPr>
+          <a:xfrm>
+            <a:off x="617706" y="5560000"/>
+            <a:ext cx="8326294" cy="2050000"/>
+          </a:xfrm>
+          <a:prstGeom prst="rect">
+            <a:avLst/>
+          </a:prstGeom>
+        </p:spPr>
+        <p:txBody>
+          <a:bodyPr anchor="ctr" lIns="320000" rIns="280000" tIns="120000" bIns="120000"/>
+          <a:lstStyle/>
+          <a:p>
+            <a:pPr algn="l"/>
+            <a:r>
+              <a:rPr lang="en-US" sz="1900" b="true">
+                <a:solidFill>
+                  <a:srgbClr val="000000"/>
+                </a:solidFill>
+                <a:latin typeface="Arial"/>
+                <a:cs typeface="Arial"/>
+              </a:rPr>
+              <a:t>What Module 2 adds   </a:t>
+            </a:r>
+            <a:r>
+              <a:rPr lang="en-US" sz="1200" b="true">
+                <a:solidFill>
+                  <a:srgbClr val="0B9FB0"/>
+                </a:solidFill>
+                <a:latin typeface="Arial"/>
+                <a:cs typeface="Arial"/>
+              </a:rPr>
+              <a:t>Live exposure</a:t>
+            </a:r>
+          </a:p>
+          <a:p>
+            <a:pPr algn="l">
+              <a:lnSpc>
+                <a:spcPct val="112000"/>
+              </a:lnSpc>
+              <a:spcBef>
+                <a:spcPts val="700"/>
+              </a:spcBef>
             </a:pPr>
             <a:r>
-              <a:rPr lang="en-US" sz="3600" b="0" u="none" strike="noStrike">
-                <a:solidFill>
-                  <a:srgbClr val="000000"/>
-                </a:solidFill>
-                <a:effectLst/>
-                <a:uFillTx/>
+              <a:rPr lang="en-US" sz="1450">
+                <a:solidFill>
+                  <a:srgbClr val="333333"/>
+                </a:solidFill>
                 <a:latin typeface="Arial"/>
-                <a:ea typeface="Arial"/>
-              </a:rPr>
-              <a:t>What is built so far (screenshots / link)</a:t>
-            </a:r>
-            <a:endParaRPr lang="en-IN" sz="3600" b="0" u="none" strike="noStrike">
-              <a:solidFill>
-                <a:srgbClr val="000000"/>
-              </a:solidFill>
-              <a:effectLst/>
-              <a:uFillTx/>
-              <a:latin typeface="Arial"/>
-            </a:endParaRPr>
-          </a:p>
-        </p:txBody>
-      </p:sp>
-      <p:sp>
-        <p:nvSpPr>
-          <p:cNvPr id="196" name="TextBox 19"/>
+                <a:cs typeface="Arial"/>
+              </a:rPr>
+              <a:t>Brings in how many people are actually on each road, so a hazard on a busy route outranks the same hazard on a quiet lane. Priority stops being static and reflects who is at risk right now.</a:t>
+            </a:r>
+          </a:p>
+        </p:txBody>
+      </p:sp>
+      <p:sp>
+        <p:nvSpPr>
+          <p:cNvPr name="TomTomCard" id="123"/>
           <p:cNvSpPr/>
           <p:nvPr/>
         </p:nvSpPr>
         <p:spPr>
           <a:xfrm>
-            <a:off x="915120" y="4926960"/>
-            <a:ext cx="16426080" cy="750960"/>
-          </a:xfrm>
-          <a:prstGeom prst="rect">
-            <a:avLst/>
-          </a:prstGeom>
-          <a:noFill/>
-          <a:ln w="0">
+            <a:off x="9344000" y="5560000"/>
+            <a:ext cx="8326294" cy="2050000"/>
+          </a:xfrm>
+          <a:prstGeom prst="rect">
+            <a:avLst/>
+          </a:prstGeom>
+          <a:solidFill>
+            <a:srgbClr val="19E3F5"/>
+          </a:solidFill>
+          <a:ln>
             <a:noFill/>
           </a:ln>
         </p:spPr>
-        <p:style>
-          <a:lnRef idx="0"/>
-          <a:fillRef idx="0"/>
-          <a:effectRef idx="0"/>
-          <a:fontRef idx="minor"/>
-        </p:style>
-        <p:txBody>
-          <a:bodyPr lIns="0" tIns="0" rIns="0" bIns="0" anchor="t">
-            <a:spAutoFit/>
-          </a:bodyPr>
-          <a:p>
-            <a:pPr defTabSz="914400">
-              <a:lnSpc>
-                <a:spcPts val="5043"/>
-              </a:lnSpc>
+        <p:txBody>
+          <a:bodyPr/>
+          <a:lstStyle/>
+          <a:p>
+            <a:endParaRPr lang="en-US"/>
+          </a:p>
+        </p:txBody>
+      </p:sp>
+      <p:sp>
+        <p:nvSpPr>
+          <p:cNvPr name="TomTomTxt" id="124"/>
+          <p:cNvSpPr txBox="true"/>
+          <p:nvPr/>
+        </p:nvSpPr>
+        <p:spPr>
+          <a:xfrm>
+            <a:off x="9344000" y="5560000"/>
+            <a:ext cx="8326294" cy="2050000"/>
+          </a:xfrm>
+          <a:prstGeom prst="rect">
+            <a:avLst/>
+          </a:prstGeom>
+        </p:spPr>
+        <p:txBody>
+          <a:bodyPr anchor="ctr" lIns="320000" rIns="280000" tIns="120000" bIns="120000"/>
+          <a:lstStyle/>
+          <a:p>
+            <a:pPr algn="l"/>
+            <a:r>
+              <a:rPr lang="en-US" sz="1900" b="true">
+                <a:solidFill>
+                  <a:srgbClr val="000000"/>
+                </a:solidFill>
+                <a:latin typeface="Arial"/>
+                <a:cs typeface="Arial"/>
+              </a:rPr>
+              <a:t>What the TomTom Traffic API does</a:t>
+            </a:r>
+          </a:p>
+          <a:p>
+            <a:pPr algn="l">
+              <a:lnSpc>
+                <a:spcPct val="112000"/>
+              </a:lnSpc>
+              <a:spcBef>
+                <a:spcPts val="700"/>
+              </a:spcBef>
             </a:pPr>
             <a:r>
-              <a:rPr lang="en-US" sz="4200" b="1" u="none" strike="noStrike">
-                <a:solidFill>
-                  <a:srgbClr val="000000"/>
-                </a:solidFill>
-                <a:effectLst/>
-                <a:uFillTx/>
-                <a:latin typeface="Arial Bold"/>
-                <a:ea typeface="Arial Bold"/>
-              </a:rPr>
-              <a:t>❖ </a:t>
-            </a:r>
-            <a:r>
-              <a:rPr lang="en-US" sz="4200" b="1" u="sng" strike="noStrike">
-                <a:solidFill>
-                  <a:srgbClr val="000000"/>
-                </a:solidFill>
-                <a:effectLst/>
-                <a:uFillTx/>
-                <a:latin typeface="Arial Bold"/>
-                <a:ea typeface="Arial Bold"/>
-              </a:rPr>
-              <a:t>MVP for Round 2</a:t>
-            </a:r>
-            <a:r>
-              <a:rPr lang="en-US" sz="4200" b="0" u="none" strike="noStrike">
-                <a:solidFill>
-                  <a:srgbClr val="555555"/>
-                </a:solidFill>
-                <a:effectLst/>
-                <a:uFillTx/>
+              <a:rPr lang="en-US" sz="1450">
+                <a:solidFill>
+                  <a:srgbClr val="05343B"/>
+                </a:solidFill>
                 <a:latin typeface="Arial"/>
-                <a:ea typeface="Arial"/>
-              </a:rPr>
-              <a:t>   (Mandatory)</a:t>
-            </a:r>
-            <a:endParaRPr lang="en-IN" sz="4200" b="0" u="none" strike="noStrike">
-              <a:solidFill>
-                <a:srgbClr val="000000"/>
-              </a:solidFill>
-              <a:effectLst/>
-              <a:uFillTx/>
-              <a:latin typeface="Arial"/>
-            </a:endParaRPr>
-          </a:p>
-        </p:txBody>
-      </p:sp>
-      <p:sp>
-        <p:nvSpPr>
-          <p:cNvPr id="197" name="TextBox 20"/>
+                <a:cs typeface="Arial"/>
+              </a:rPr>
+              <a:t>Feeds live traffic volume and congestion for every location, turning the ranking into a real-time, exposure-weighted worklist and showing the officer which hazards hit the most road users at any moment.</a:t>
+            </a:r>
+          </a:p>
+        </p:txBody>
+      </p:sp>
+      <p:sp>
+        <p:nvSpPr>
+          <p:cNvPr name="FlowCard0" id="130"/>
           <p:cNvSpPr/>
           <p:nvPr/>
         </p:nvSpPr>
         <p:spPr>
           <a:xfrm>
-            <a:off x="915120" y="5947200"/>
-            <a:ext cx="16426080" cy="1995840"/>
-          </a:xfrm>
-          <a:prstGeom prst="rect">
-            <a:avLst/>
-          </a:prstGeom>
-          <a:noFill/>
-          <a:ln w="0">
+            <a:off x="617706" y="7760000"/>
+            <a:ext cx="5350862" cy="1240000"/>
+          </a:xfrm>
+          <a:prstGeom prst="rect">
+            <a:avLst/>
+          </a:prstGeom>
+          <a:solidFill>
+            <a:srgbClr val="FFFFFF"/>
+          </a:solidFill>
+          <a:ln w="12700">
+            <a:solidFill>
+              <a:srgbClr val="D9D9D9"/>
+            </a:solidFill>
+          </a:ln>
+        </p:spPr>
+        <p:txBody>
+          <a:bodyPr/>
+          <a:lstStyle/>
+          <a:p>
+            <a:endParaRPr lang="en-US"/>
+          </a:p>
+        </p:txBody>
+      </p:sp>
+      <p:sp>
+        <p:nvSpPr>
+          <p:cNvPr name="FlowBar0" id="133"/>
+          <p:cNvSpPr/>
+          <p:nvPr/>
+        </p:nvSpPr>
+        <p:spPr>
+          <a:xfrm>
+            <a:off x="617706" y="7760000"/>
+            <a:ext cx="90000" cy="1240000"/>
+          </a:xfrm>
+          <a:prstGeom prst="rect">
+            <a:avLst/>
+          </a:prstGeom>
+          <a:solidFill>
+            <a:srgbClr val="0B9FB0"/>
+          </a:solidFill>
+          <a:ln>
             <a:noFill/>
           </a:ln>
         </p:spPr>
-        <p:style>
-          <a:lnRef idx="0"/>
-          <a:fillRef idx="0"/>
-          <a:effectRef idx="0"/>
-          <a:fontRef idx="minor"/>
-        </p:style>
-        <p:txBody>
-          <a:bodyPr lIns="0" tIns="0" rIns="0" bIns="0" anchor="t">
-            <a:spAutoFit/>
-          </a:bodyPr>
-          <a:p>
-            <a:pPr marL="652680" lvl="1" indent="-326160" defTabSz="914400">
-              <a:lnSpc>
-                <a:spcPts val="4323"/>
-              </a:lnSpc>
-              <a:buClr>
-                <a:srgbClr val="000000"/>
-              </a:buClr>
-              <a:buFont typeface="Arial"/>
-              <a:buChar char="•"/>
+        <p:txBody>
+          <a:bodyPr/>
+          <a:lstStyle/>
+          <a:p>
+            <a:endParaRPr lang="en-US"/>
+          </a:p>
+        </p:txBody>
+      </p:sp>
+      <p:sp>
+        <p:nvSpPr>
+          <p:cNvPr name="FlowTxt0" id="136"/>
+          <p:cNvSpPr txBox="true"/>
+          <p:nvPr/>
+        </p:nvSpPr>
+        <p:spPr>
+          <a:xfrm>
+            <a:off x="617706" y="7760000"/>
+            <a:ext cx="5350862" cy="1240000"/>
+          </a:xfrm>
+          <a:prstGeom prst="rect">
+            <a:avLst/>
+          </a:prstGeom>
+        </p:spPr>
+        <p:txBody>
+          <a:bodyPr anchor="ctr" lIns="300000" rIns="240000" tIns="70000" bIns="70000"/>
+          <a:lstStyle/>
+          <a:p>
+            <a:pPr algn="l"/>
+            <a:r>
+              <a:rPr lang="en-US" sz="1300" b="true">
+                <a:solidFill>
+                  <a:srgbClr val="0B9FB0"/>
+                </a:solidFill>
+                <a:latin typeface="Arial"/>
+                <a:cs typeface="Arial"/>
+              </a:rPr>
+              <a:t>INPUT</a:t>
+            </a:r>
+          </a:p>
+          <a:p>
+            <a:pPr algn="l">
+              <a:lnSpc>
+                <a:spcPct val="106000"/>
+              </a:lnSpc>
+              <a:spcBef>
+                <a:spcPts val="400"/>
+              </a:spcBef>
             </a:pPr>
             <a:r>
-              <a:rPr lang="en-US" sz="3600" b="0" u="none" strike="noStrike">
+              <a:rPr lang="en-US" sz="1350">
                 <a:solidFill>
                   <a:srgbClr val="000000"/>
                 </a:solidFill>
-                <a:effectLst/>
-                <a:uFillTx/>
                 <a:latin typeface="Arial"/>
-                <a:ea typeface="Arial"/>
-              </a:rPr>
-              <a:t>Must-have features for the complete prototype</a:t>
-            </a:r>
-            <a:endParaRPr lang="en-IN" sz="3600" b="0" u="none" strike="noStrike">
-              <a:solidFill>
-                <a:srgbClr val="000000"/>
-              </a:solidFill>
-              <a:effectLst/>
-              <a:uFillTx/>
-              <a:latin typeface="Arial"/>
-            </a:endParaRPr>
-          </a:p>
-          <a:p>
-            <a:pPr marL="652680" lvl="1" indent="-326160" defTabSz="914400">
-              <a:lnSpc>
-                <a:spcPts val="4323"/>
-              </a:lnSpc>
-              <a:buClr>
-                <a:srgbClr val="000000"/>
-              </a:buClr>
-              <a:buFont typeface="Arial"/>
-              <a:buChar char="•"/>
+                <a:cs typeface="Arial"/>
+              </a:rPr>
+              <a:t>Incident logs, complaints and live TomTom traffic</a:t>
+            </a:r>
+          </a:p>
+        </p:txBody>
+      </p:sp>
+      <p:sp>
+        <p:nvSpPr>
+          <p:cNvPr name="FlowCard1" id="131"/>
+          <p:cNvSpPr/>
+          <p:nvPr/>
+        </p:nvSpPr>
+        <p:spPr>
+          <a:xfrm>
+            <a:off x="6468568" y="7760000"/>
+            <a:ext cx="5350862" cy="1240000"/>
+          </a:xfrm>
+          <a:prstGeom prst="rect">
+            <a:avLst/>
+          </a:prstGeom>
+          <a:solidFill>
+            <a:srgbClr val="FFFFFF"/>
+          </a:solidFill>
+          <a:ln w="12700">
+            <a:solidFill>
+              <a:srgbClr val="D9D9D9"/>
+            </a:solidFill>
+          </a:ln>
+        </p:spPr>
+        <p:txBody>
+          <a:bodyPr/>
+          <a:lstStyle/>
+          <a:p>
+            <a:endParaRPr lang="en-US"/>
+          </a:p>
+        </p:txBody>
+      </p:sp>
+      <p:sp>
+        <p:nvSpPr>
+          <p:cNvPr name="FlowBar1" id="134"/>
+          <p:cNvSpPr/>
+          <p:nvPr/>
+        </p:nvSpPr>
+        <p:spPr>
+          <a:xfrm>
+            <a:off x="6468568" y="7760000"/>
+            <a:ext cx="90000" cy="1240000"/>
+          </a:xfrm>
+          <a:prstGeom prst="rect">
+            <a:avLst/>
+          </a:prstGeom>
+          <a:solidFill>
+            <a:srgbClr val="0B9FB0"/>
+          </a:solidFill>
+          <a:ln>
+            <a:noFill/>
+          </a:ln>
+        </p:spPr>
+        <p:txBody>
+          <a:bodyPr/>
+          <a:lstStyle/>
+          <a:p>
+            <a:endParaRPr lang="en-US"/>
+          </a:p>
+        </p:txBody>
+      </p:sp>
+      <p:sp>
+        <p:nvSpPr>
+          <p:cNvPr name="FlowTxt1" id="137"/>
+          <p:cNvSpPr txBox="true"/>
+          <p:nvPr/>
+        </p:nvSpPr>
+        <p:spPr>
+          <a:xfrm>
+            <a:off x="6468568" y="7760000"/>
+            <a:ext cx="5350862" cy="1240000"/>
+          </a:xfrm>
+          <a:prstGeom prst="rect">
+            <a:avLst/>
+          </a:prstGeom>
+        </p:spPr>
+        <p:txBody>
+          <a:bodyPr anchor="ctr" lIns="300000" rIns="240000" tIns="70000" bIns="70000"/>
+          <a:lstStyle/>
+          <a:p>
+            <a:pPr algn="l"/>
+            <a:r>
+              <a:rPr lang="en-US" sz="1300" b="true">
+                <a:solidFill>
+                  <a:srgbClr val="0B9FB0"/>
+                </a:solidFill>
+                <a:latin typeface="Arial"/>
+                <a:cs typeface="Arial"/>
+              </a:rPr>
+              <a:t>OUTPUT</a:t>
+            </a:r>
+          </a:p>
+          <a:p>
+            <a:pPr algn="l">
+              <a:lnSpc>
+                <a:spcPct val="106000"/>
+              </a:lnSpc>
+              <a:spcBef>
+                <a:spcPts val="400"/>
+              </a:spcBef>
             </a:pPr>
             <a:r>
-              <a:rPr lang="en-US" sz="3600" b="0" u="none" strike="noStrike">
+              <a:rPr lang="en-US" sz="1350">
                 <a:solidFill>
                   <a:srgbClr val="000000"/>
                 </a:solidFill>
-                <a:effectLst/>
-                <a:uFillTx/>
                 <a:latin typeface="Arial"/>
-                <a:ea typeface="Arial"/>
-              </a:rPr>
-              <a:t>Demo workflow: input → output → action</a:t>
-            </a:r>
-            <a:endParaRPr lang="en-IN" sz="3600" b="0" u="none" strike="noStrike">
-              <a:solidFill>
-                <a:srgbClr val="000000"/>
-              </a:solidFill>
-              <a:effectLst/>
-              <a:uFillTx/>
-              <a:latin typeface="Arial"/>
-            </a:endParaRPr>
+                <a:cs typeface="Arial"/>
+              </a:rPr>
+              <a:t>One ranked, confidence-scored worklist on a map</a:t>
+            </a:r>
+          </a:p>
+        </p:txBody>
+      </p:sp>
+      <p:sp>
+        <p:nvSpPr>
+          <p:cNvPr name="FlowCard2" id="132"/>
+          <p:cNvSpPr/>
+          <p:nvPr/>
+        </p:nvSpPr>
+        <p:spPr>
+          <a:xfrm>
+            <a:off x="12319430" y="7760000"/>
+            <a:ext cx="5350862" cy="1240000"/>
+          </a:xfrm>
+          <a:prstGeom prst="rect">
+            <a:avLst/>
+          </a:prstGeom>
+          <a:solidFill>
+            <a:srgbClr val="FFFFFF"/>
+          </a:solidFill>
+          <a:ln w="12700">
+            <a:solidFill>
+              <a:srgbClr val="D9D9D9"/>
+            </a:solidFill>
+          </a:ln>
+        </p:spPr>
+        <p:txBody>
+          <a:bodyPr/>
+          <a:lstStyle/>
+          <a:p>
+            <a:endParaRPr lang="en-US"/>
+          </a:p>
+        </p:txBody>
+      </p:sp>
+      <p:sp>
+        <p:nvSpPr>
+          <p:cNvPr name="FlowBar2" id="135"/>
+          <p:cNvSpPr/>
+          <p:nvPr/>
+        </p:nvSpPr>
+        <p:spPr>
+          <a:xfrm>
+            <a:off x="12319430" y="7760000"/>
+            <a:ext cx="90000" cy="1240000"/>
+          </a:xfrm>
+          <a:prstGeom prst="rect">
+            <a:avLst/>
+          </a:prstGeom>
+          <a:solidFill>
+            <a:srgbClr val="0B9FB0"/>
+          </a:solidFill>
+          <a:ln>
+            <a:noFill/>
+          </a:ln>
+        </p:spPr>
+        <p:txBody>
+          <a:bodyPr/>
+          <a:lstStyle/>
+          <a:p>
+            <a:endParaRPr lang="en-US"/>
+          </a:p>
+        </p:txBody>
+      </p:sp>
+      <p:sp>
+        <p:nvSpPr>
+          <p:cNvPr name="FlowTxt2" id="138"/>
+          <p:cNvSpPr txBox="true"/>
+          <p:nvPr/>
+        </p:nvSpPr>
+        <p:spPr>
+          <a:xfrm>
+            <a:off x="12319430" y="7760000"/>
+            <a:ext cx="5350862" cy="1240000"/>
+          </a:xfrm>
+          <a:prstGeom prst="rect">
+            <a:avLst/>
+          </a:prstGeom>
+        </p:spPr>
+        <p:txBody>
+          <a:bodyPr anchor="ctr" lIns="300000" rIns="240000" tIns="70000" bIns="70000"/>
+          <a:lstStyle/>
+          <a:p>
+            <a:pPr algn="l"/>
+            <a:r>
+              <a:rPr lang="en-US" sz="1300" b="true">
+                <a:solidFill>
+                  <a:srgbClr val="0B9FB0"/>
+                </a:solidFill>
+                <a:latin typeface="Arial"/>
+                <a:cs typeface="Arial"/>
+              </a:rPr>
+              <a:t>ACTION</a:t>
+            </a:r>
+          </a:p>
+          <a:p>
+            <a:pPr algn="l">
+              <a:lnSpc>
+                <a:spcPct val="106000"/>
+              </a:lnSpc>
+              <a:spcBef>
+                <a:spcPts val="400"/>
+              </a:spcBef>
+            </a:pPr>
+            <a:r>
+              <a:rPr lang="en-US" sz="1350">
+                <a:solidFill>
+                  <a:srgbClr val="000000"/>
+                </a:solidFill>
+                <a:latin typeface="Arial"/>
+                <a:cs typeface="Arial"/>
+              </a:rPr>
+              <a:t>Crews dispatched to the highest-risk spots first</a:t>
+            </a:r>
+          </a:p>
+        </p:txBody>
+      </p:sp>
+      <p:sp>
+        <p:nvSpPr>
+          <p:cNvPr name="Arrow0" id="139"/>
+          <p:cNvSpPr txBox="true"/>
+          <p:nvPr/>
+        </p:nvSpPr>
+        <p:spPr>
+          <a:xfrm>
+            <a:off x="5968568" y="7760000"/>
+            <a:ext cx="500000" cy="1240000"/>
+          </a:xfrm>
+          <a:prstGeom prst="rect">
+            <a:avLst/>
+          </a:prstGeom>
+        </p:spPr>
+        <p:txBody>
+          <a:bodyPr anchor="ctr" lIns="0" rIns="0" tIns="0" bIns="0"/>
+          <a:lstStyle/>
+          <a:p>
+            <a:pPr algn="ctr"/>
+            <a:r>
+              <a:rPr lang="en-US" sz="2400" b="true">
+                <a:solidFill>
+                  <a:srgbClr val="0B9FB0"/>
+                </a:solidFill>
+                <a:latin typeface="Arial"/>
+                <a:cs typeface="Arial"/>
+              </a:rPr>
+              <a:t>▸</a:t>
+            </a:r>
+          </a:p>
+        </p:txBody>
+      </p:sp>
+      <p:sp>
+        <p:nvSpPr>
+          <p:cNvPr name="Arrow1" id="140"/>
+          <p:cNvSpPr txBox="true"/>
+          <p:nvPr/>
+        </p:nvSpPr>
+        <p:spPr>
+          <a:xfrm>
+            <a:off x="11819430" y="7760000"/>
+            <a:ext cx="500000" cy="1240000"/>
+          </a:xfrm>
+          <a:prstGeom prst="rect">
+            <a:avLst/>
+          </a:prstGeom>
+        </p:spPr>
+        <p:txBody>
+          <a:bodyPr anchor="ctr" lIns="0" rIns="0" tIns="0" bIns="0"/>
+          <a:lstStyle/>
+          <a:p>
+            <a:pPr algn="ctr"/>
+            <a:r>
+              <a:rPr lang="en-US" sz="2400" b="true">
+                <a:solidFill>
+                  <a:srgbClr val="0B9FB0"/>
+                </a:solidFill>
+                <a:latin typeface="Arial"/>
+                <a:cs typeface="Arial"/>
+              </a:rPr>
+              <a:t>▸</a:t>
+            </a:r>
           </a:p>
         </p:txBody>
       </p:sp>
     </p:spTree>
   </p:cSld>
-  <mc:AlternateContent>
-    <mc:Choice Requires="p14">
-      <p:transition spd="slow" p14:dur="2000"/>
-    </mc:Choice>
-    <mc:Fallback>
-      <p:transition spd="slow"/>
-    </mc:Fallback>
-  </mc:AlternateContent>
+  <p:clrMapOvr>
+    <a:masterClrMapping/>
+  </p:clrMapOvr>
 </p:sld>
 </file>
 
